--- a/docs/week07/UC8_Week07_Presentation_Client.pptx
+++ b/docs/week07/UC8_Week07_Presentation_Client.pptx
@@ -3218,7 +3218,7 @@
               </a:defRPr>
             </a:pPr>
             <a:r>
-              <a:t>GIẢI PHÁP TỰ ĐỘNG HÓA DÂY CHUYỀN SẢN XUẤT CÔNG NGHIỆP 4.0</a:t>
+              <a:t>INDUSTRY 4.0 AUTOMATED LOGISTICS &amp; ROBOTICS SOLUTION</a:t>
             </a:r>
           </a:p>
           <a:p>
@@ -3233,11 +3233,11 @@
               </a:defRPr>
             </a:pPr>
             <a:r>
-              <a:t>Hệ Thống Phân Loại Băng Chuyền Bằng Robot UR10e</a:t>
+              <a:t>Automated Conveyor Sorting System with UR10e</a:t>
             </a:r>
             <a:br/>
             <a:r>
-              <a:t>&amp; Thị Giác Máy Thông Minh</a:t>
+              <a:t>&amp; Smart Machine Vision</a:t>
             </a:r>
           </a:p>
           <a:p>
@@ -3252,11 +3252,11 @@
               </a:defRPr>
             </a:pPr>
             <a:r>
-              <a:t>Báo Cáo Tiến Độ Dự Án (Week 07) — Phiên Bản Trình Chiếu Doanh Nghiệp &amp; Khách Hàng</a:t>
+              <a:t>Project Progress Report (Week 07) — Client &amp; Executive Briefing</a:t>
             </a:r>
             <a:br/>
             <a:r>
-              <a:t>Tối ưu hóa chuyển động lượn sóng (+47% năng suất) • Mỏ kẹp tự nắn phẳng • Thị giác không điểm mù</a:t>
+              <a:t>Continuous Wave Motion (+47% Throughput) • Self-Centering Gripper • Zero-Blind-Spot Inspection</a:t>
             </a:r>
           </a:p>
           <a:p>
@@ -3268,7 +3268,7 @@
               </a:defRPr>
             </a:pPr>
             <a:r>
-              <a:t>Đơn vị phát triển: Nhóm Kỹ Thuật Đồ Án Robot — Trường Đại Học Việt Đức (VGU) | Tháng 10/2026</a:t>
+              <a:t>Engineering Team: Robotic Project Team — Vietnamese-German University (VGU) | October 2026</a:t>
             </a:r>
           </a:p>
         </p:txBody>
@@ -3410,7 +3410,7 @@
               </a:defRPr>
             </a:pPr>
             <a:r>
-              <a:t>HIỆU QUẢ THỰC NGHIỆM</a:t>
+              <a:t>EMPIRICAL BENCHMARKS</a:t>
             </a:r>
           </a:p>
           <a:p>
@@ -3422,7 +3422,7 @@
               </a:defRPr>
             </a:pPr>
             <a:r>
-              <a:t>Minh Chứng Hiệu Quả Thực Tế — Thử Nghiệm 25 Kiện Hàng Liên Tục</a:t>
+              <a:t>Empirical 25-Trial Continuous Run Verification</a:t>
             </a:r>
           </a:p>
         </p:txBody>
@@ -3436,7 +3436,7 @@
         <p:spPr>
           <a:xfrm>
             <a:off x="10515600" y="228600"/>
-            <a:ext cx="1097280" cy="594360"/>
+            <a:ext cx="1097280" cy="548640"/>
           </a:xfrm>
           <a:prstGeom prst="rect">
             <a:avLst/>
@@ -3450,7 +3450,7 @@
           <a:lstStyle/>
           <a:p>
             <a:pPr algn="r">
-              <a:defRPr sz="1300" b="1">
+              <a:defRPr sz="1400" b="1">
                 <a:solidFill>
                   <a:srgbClr val="0284C7"/>
                 </a:solidFill>
@@ -3499,7 +3499,7 @@
                         </a:defRPr>
                       </a:pPr>
                       <a:r>
-                        <a:t>Chỉ Số Vận Hành (KPI)</a:t>
+                        <a:t>Key Performance Metric</a:t>
                       </a:r>
                     </a:p>
                   </a:txBody>
@@ -3522,7 +3522,7 @@
                         </a:defRPr>
                       </a:pPr>
                       <a:r>
-                        <a:t>Công Nghệ Cũ</a:t>
+                        <a:t>Baseline Prototype</a:t>
                       </a:r>
                     </a:p>
                   </a:txBody>
@@ -3545,7 +3545,7 @@
                         </a:defRPr>
                       </a:pPr>
                       <a:r>
-                        <a:t>Giải Pháp Mới (Week 07)</a:t>
+                        <a:t>Production Cell (Week 07)</a:t>
                       </a:r>
                     </a:p>
                   </a:txBody>
@@ -3570,7 +3570,7 @@
                         </a:defRPr>
                       </a:pPr>
                       <a:r>
-                        <a:t>Số lần dừng giật</a:t>
+                        <a:t>Stop-and-Go Pauses</a:t>
                       </a:r>
                     </a:p>
                   </a:txBody>
@@ -3593,7 +3593,7 @@
                         </a:defRPr>
                       </a:pPr>
                       <a:r>
-                        <a:t>10 lần dừng/chu kỳ</a:t>
+                        <a:t>10 pauses/cycle</a:t>
                       </a:r>
                     </a:p>
                   </a:txBody>
@@ -3616,7 +3616,7 @@
                         </a:defRPr>
                       </a:pPr>
                       <a:r>
-                        <a:t>0 lần (Mượt mà 100%)</a:t>
+                        <a:t>0 pauses (Continuous Wave)</a:t>
                       </a:r>
                     </a:p>
                   </a:txBody>
@@ -3641,7 +3641,7 @@
                         </a:defRPr>
                       </a:pPr>
                       <a:r>
-                        <a:t>Chu kỳ Thùng Vàng</a:t>
+                        <a:t>Yellow Bin Cycle</a:t>
                       </a:r>
                     </a:p>
                   </a:txBody>
@@ -3664,7 +3664,7 @@
                         </a:defRPr>
                       </a:pPr>
                       <a:r>
-                        <a:t>24.95 giây</a:t>
+                        <a:t>24.95 s</a:t>
                       </a:r>
                     </a:p>
                   </a:txBody>
@@ -3687,7 +3687,7 @@
                         </a:defRPr>
                       </a:pPr>
                       <a:r>
-                        <a:t>13.36 giây (-46.5%)</a:t>
+                        <a:t>13.36 s (-46.5%)</a:t>
                       </a:r>
                     </a:p>
                   </a:txBody>
@@ -3712,7 +3712,7 @@
                         </a:defRPr>
                       </a:pPr>
                       <a:r>
-                        <a:t>Chu kỳ Thùng Đỏ</a:t>
+                        <a:t>Red Bin Cycle</a:t>
                       </a:r>
                     </a:p>
                   </a:txBody>
@@ -3735,7 +3735,7 @@
                         </a:defRPr>
                       </a:pPr>
                       <a:r>
-                        <a:t>21.00 giây</a:t>
+                        <a:t>21.00 s</a:t>
                       </a:r>
                     </a:p>
                   </a:txBody>
@@ -3758,7 +3758,7 @@
                         </a:defRPr>
                       </a:pPr>
                       <a:r>
-                        <a:t>13.62 giây (-35.1%)</a:t>
+                        <a:t>13.62 s (-35.1%)</a:t>
                       </a:r>
                     </a:p>
                   </a:txBody>
@@ -3783,7 +3783,7 @@
                         </a:defRPr>
                       </a:pPr>
                       <a:r>
-                        <a:t>Chu kỳ Thùng Xanh</a:t>
+                        <a:t>Blue Bin Cycle</a:t>
                       </a:r>
                     </a:p>
                   </a:txBody>
@@ -3806,7 +3806,7 @@
                         </a:defRPr>
                       </a:pPr>
                       <a:r>
-                        <a:t>32.72 giây</a:t>
+                        <a:t>32.72 s</a:t>
                       </a:r>
                     </a:p>
                   </a:txBody>
@@ -3829,7 +3829,7 @@
                         </a:defRPr>
                       </a:pPr>
                       <a:r>
-                        <a:t>19.02 giây (-41.9%)</a:t>
+                        <a:t>19.02 s (-41.9%)</a:t>
                       </a:r>
                     </a:p>
                   </a:txBody>
@@ -3854,7 +3854,7 @@
                         </a:defRPr>
                       </a:pPr>
                       <a:r>
-                        <a:t>Chu kỳ Trung Bình</a:t>
+                        <a:t>Mean Cycle Time</a:t>
                       </a:r>
                     </a:p>
                   </a:txBody>
@@ -3877,7 +3877,7 @@
                         </a:defRPr>
                       </a:pPr>
                       <a:r>
-                        <a:t>25.00 giây</a:t>
+                        <a:t>25.00 s</a:t>
                       </a:r>
                     </a:p>
                   </a:txBody>
@@ -3900,7 +3900,7 @@
                         </a:defRPr>
                       </a:pPr>
                       <a:r>
-                        <a:t>15.68 giây (-37.3%)</a:t>
+                        <a:t>15.68 s (-37.3%)</a:t>
                       </a:r>
                     </a:p>
                   </a:txBody>
@@ -3925,7 +3925,7 @@
                         </a:defRPr>
                       </a:pPr>
                       <a:r>
-                        <a:t>Tỷ lệ gắp thành công</a:t>
+                        <a:t>Pick Success Rate</a:t>
                       </a:r>
                     </a:p>
                   </a:txBody>
@@ -3948,7 +3948,7 @@
                         </a:defRPr>
                       </a:pPr>
                       <a:r>
-                        <a:t>Đạt yêu cầu</a:t>
+                        <a:t>Baseline Pass</a:t>
                       </a:r>
                     </a:p>
                   </a:txBody>
@@ -3971,7 +3971,7 @@
                         </a:defRPr>
                       </a:pPr>
                       <a:r>
-                        <a:t>100.0% (25/25 kiện)</a:t>
+                        <a:t>100.0% (25/25 items)</a:t>
                       </a:r>
                     </a:p>
                   </a:txBody>
@@ -3996,7 +3996,7 @@
                         </a:defRPr>
                       </a:pPr>
                       <a:r>
-                        <a:t>Tỷ lệ phân loại đúng</a:t>
+                        <a:t>Sorting Accuracy</a:t>
                       </a:r>
                     </a:p>
                   </a:txBody>
@@ -4019,7 +4019,7 @@
                         </a:defRPr>
                       </a:pPr>
                       <a:r>
-                        <a:t>Đạt yêu cầu</a:t>
+                        <a:t>Baseline Pass</a:t>
                       </a:r>
                     </a:p>
                   </a:txBody>
@@ -4042,7 +4042,7 @@
                         </a:defRPr>
                       </a:pPr>
                       <a:r>
-                        <a:t>100.0% (25/25 kiện)</a:t>
+                        <a:t>100.0% (25/25 items)</a:t>
                       </a:r>
                     </a:p>
                   </a:txBody>
@@ -4067,7 +4067,7 @@
                         </a:defRPr>
                       </a:pPr>
                       <a:r>
-                        <a:t>Sự cố va chạm hàng</a:t>
+                        <a:t>Conveyor Collisions</a:t>
                       </a:r>
                     </a:p>
                   </a:txBody>
@@ -4090,7 +4090,7 @@
                         </a:defRPr>
                       </a:pPr>
                       <a:r>
-                        <a:t>Thỉnh thoảng va chạm</a:t>
+                        <a:t>Intermittent risk</a:t>
                       </a:r>
                     </a:p>
                   </a:txBody>
@@ -4113,7 +4113,7 @@
                         </a:defRPr>
                       </a:pPr>
                       <a:r>
-                        <a:t>0 sự cố (Thoát hiểm 0.2s)</a:t>
+                        <a:t>0 incidents (0.2s Escape)</a:t>
                       </a:r>
                     </a:p>
                   </a:txBody>
@@ -4154,7 +4154,7 @@
       </p:pic>
       <p:sp>
         <p:nvSpPr>
-          <p:cNvPr id="8" name="Rounded Rectangle 7"/>
+          <p:cNvPr id="8" name="Rectangle 7"/>
           <p:cNvSpPr/>
           <p:nvPr/>
         </p:nvSpPr>
@@ -4163,10 +4163,8 @@
             <a:off x="731520" y="4114800"/>
             <a:ext cx="10698480" cy="2194560"/>
           </a:xfrm>
-          <a:prstGeom prst="roundRect">
-            <a:avLst>
-              <a:gd name="adj" fmla="val 2500"/>
-            </a:avLst>
+          <a:prstGeom prst="rect">
+            <a:avLst/>
           </a:prstGeom>
           <a:solidFill>
             <a:srgbClr val="FFFFFF"/>
@@ -4201,14 +4199,57 @@
       </p:sp>
       <p:sp>
         <p:nvSpPr>
-          <p:cNvPr id="9" name="TextBox 8"/>
+          <p:cNvPr id="9" name="Rectangle 8"/>
+          <p:cNvSpPr/>
+          <p:nvPr/>
+        </p:nvSpPr>
+        <p:spPr>
+          <a:xfrm>
+            <a:off x="731520" y="4114800"/>
+            <a:ext cx="10698480" cy="36576"/>
+          </a:xfrm>
+          <a:prstGeom prst="rect">
+            <a:avLst/>
+          </a:prstGeom>
+          <a:solidFill>
+            <a:srgbClr val="0284C7"/>
+          </a:solidFill>
+          <a:ln>
+            <a:noFill/>
+          </a:ln>
+        </p:spPr>
+        <p:style>
+          <a:lnRef idx="1">
+            <a:schemeClr val="accent1"/>
+          </a:lnRef>
+          <a:fillRef idx="3">
+            <a:schemeClr val="accent1"/>
+          </a:fillRef>
+          <a:effectRef idx="2">
+            <a:schemeClr val="accent1"/>
+          </a:effectRef>
+          <a:fontRef idx="minor">
+            <a:schemeClr val="lt1"/>
+          </a:fontRef>
+        </p:style>
+        <p:txBody>
+          <a:bodyPr rtlCol="0" anchor="ctr"/>
+          <a:lstStyle/>
+          <a:p>
+            <a:pPr algn="ctr"/>
+          </a:p>
+        </p:txBody>
+      </p:sp>
+      <p:sp>
+        <p:nvSpPr>
+          <p:cNvPr id="10" name="TextBox 9"/>
           <p:cNvSpPr txBox="1"/>
           <p:nvPr/>
         </p:nvSpPr>
         <p:spPr>
           <a:xfrm>
-            <a:off x="932688" y="4279392"/>
-            <a:ext cx="10296144" cy="1865376"/>
+            <a:off x="960120" y="4251960"/>
+            <a:ext cx="10241280" cy="1920240"/>
           </a:xfrm>
           <a:prstGeom prst="rect">
             <a:avLst/>
@@ -4223,7 +4264,7 @@
           <a:p>
             <a:pPr>
               <a:spcAft>
-                <a:spcPts val="300"/>
+                <a:spcPts val="200"/>
               </a:spcAft>
               <a:defRPr sz="1400" b="1">
                 <a:solidFill>
@@ -4232,7 +4273,7 @@
               </a:defRPr>
             </a:pPr>
             <a:r>
-              <a:t>Đánh Giá Kết Quả Thực Nghiệm &amp; Giá Trị Mang Lại</a:t>
+              <a:t>Empirical Run Evaluation &amp; Tangible Client Value</a:t>
             </a:r>
           </a:p>
           <a:p>
@@ -4240,14 +4281,14 @@
               <a:spcAft>
                 <a:spcPts val="800"/>
               </a:spcAft>
-              <a:defRPr sz="1000">
+              <a:defRPr sz="950" i="1">
                 <a:solidFill>
                   <a:srgbClr val="64748B"/>
                 </a:solidFill>
               </a:defRPr>
             </a:pPr>
             <a:r>
-              <a:t>Dữ liệu đo đạc thực tế từ chuỗi 25 lần gắp liên tục không ngừng nghỉ</a:t>
+              <a:t>Verified data from 25 consecutive autonomous pick-and-place cycles without interruption</a:t>
             </a:r>
           </a:p>
           <a:p>
@@ -4262,7 +4303,7 @@
                   <a:srgbClr val="0F2B48"/>
                 </a:solidFill>
               </a:rPr>
-              <a:t>Năng Suất Vượt Trội: </a:t>
+              <a:t>Substantial Throughput Surge: </a:t>
             </a:r>
             <a:r>
               <a:rPr sz="1100">
@@ -4270,7 +4311,7 @@
                   <a:srgbClr val="1E293B"/>
                 </a:solidFill>
               </a:rPr>
-              <a:t>Tốc độ phân loại tăng gần gấp đôi (thời gian chu kỳ rút ngắn từ 25s xuống chỉ còn 13.3s), giúp doanh nghiệp tăng mạnh sản lượng mỗi ca làm việc.</a:t>
+              <a:t>Sorting cycle time reduced from ~25s down to 13.3s, allowing manufacturing facilities to significantly boost parts-per-hour output.</a:t>
             </a:r>
           </a:p>
           <a:p>
@@ -4285,7 +4326,7 @@
                   <a:srgbClr val="0F2B48"/>
                 </a:solidFill>
               </a:rPr>
-              <a:t>Độ Tin Cậy Tuyệt Đối (100%): </a:t>
+              <a:t>100% Sorting Reliability: </a:t>
             </a:r>
             <a:r>
               <a:rPr sz="1100">
@@ -4293,7 +4334,7 @@
                   <a:srgbClr val="1E293B"/>
                 </a:solidFill>
               </a:rPr>
-              <a:t>25 trên 25 kiện hàng được gắp và thả chuẩn xác vào đúng thùng chỉ định, không một lần đánh rơi hay nhầm lẫn màu sắc.</a:t>
+              <a:t>25 out of 25 consecutive workpieces picked and deposited accurately into designated bins without a single drop or color mismatch.</a:t>
             </a:r>
           </a:p>
           <a:p>
@@ -4308,7 +4349,7 @@
                   <a:srgbClr val="0F2B48"/>
                 </a:solidFill>
               </a:rPr>
-              <a:t>Lưu Thông Trơn Tru 0 Va Chạm: </a:t>
+              <a:t>Zero Conveyor Collisions: </a:t>
             </a:r>
             <a:r>
               <a:rPr sz="1100">
@@ -4316,7 +4357,7 @@
                   <a:srgbClr val="1E293B"/>
                 </a:solidFill>
               </a:rPr>
-              <a:t>Cơ chế nhấc bốc bổng trong 0.2s giải phóng hoàn toàn mặt băng tải, các kiện hàng phía sau trôi tới thông suốt 100%.</a:t>
+              <a:t>The 0.2s rapid vertical escape lift frees conveyor airspace instantly, enabling smooth, uninterrupted upstream workpiece feed.</a:t>
             </a:r>
           </a:p>
           <a:p>
@@ -4331,7 +4372,7 @@
                   <a:srgbClr val="0F2B48"/>
                 </a:solidFill>
               </a:rPr>
-              <a:t>Độ Ổn Định Cao: </a:t>
+              <a:t>High Repeatability &amp; Stability: </a:t>
             </a:r>
             <a:r>
               <a:rPr sz="1100">
@@ -4339,7 +4380,7 @@
                   <a:srgbClr val="059669"/>
                 </a:solidFill>
               </a:rPr>
-              <a:t>Biểu đồ thời gian cho thấy các lần chạy có độ đồng đều cực kỳ cao (độ lệch chuẩn chỉ 2.76s), bảo đảm dây chuyền vận hành bền bỉ.</a:t>
+              <a:t>Cycle time variance remained remarkably tight (standard deviation of only 2.76s), proving production-grade stamina.</a:t>
             </a:r>
           </a:p>
         </p:txBody>
@@ -4481,7 +4522,7 @@
               </a:defRPr>
             </a:pPr>
             <a:r>
-              <a:t>LỘ TRÌNH TRIỂN KHAI</a:t>
+              <a:t>PROJECT ROADMAP</a:t>
             </a:r>
           </a:p>
           <a:p>
@@ -4493,7 +4534,7 @@
               </a:defRPr>
             </a:pPr>
             <a:r>
-              <a:t>Kế Hoạch Hoàn Thiện Tuần Tới (Week 08) &amp; Lộ Trình Nghiệm Thu (Week 10)</a:t>
+              <a:t>Upcoming Sprint (Week 08) &amp; Milestone 2 Handover (Week 10)</a:t>
             </a:r>
           </a:p>
         </p:txBody>
@@ -4507,7 +4548,7 @@
         <p:spPr>
           <a:xfrm>
             <a:off x="10515600" y="228600"/>
-            <a:ext cx="1097280" cy="594360"/>
+            <a:ext cx="1097280" cy="548640"/>
           </a:xfrm>
           <a:prstGeom prst="rect">
             <a:avLst/>
@@ -4521,7 +4562,7 @@
           <a:lstStyle/>
           <a:p>
             <a:pPr algn="r">
-              <a:defRPr sz="1300" b="1">
+              <a:defRPr sz="1400" b="1">
                 <a:solidFill>
                   <a:srgbClr val="0284C7"/>
                 </a:solidFill>
@@ -4535,7 +4576,7 @@
       </p:sp>
       <p:sp>
         <p:nvSpPr>
-          <p:cNvPr id="6" name="Rounded Rectangle 5"/>
+          <p:cNvPr id="6" name="Rectangle 5"/>
           <p:cNvSpPr/>
           <p:nvPr/>
         </p:nvSpPr>
@@ -4544,10 +4585,8 @@
             <a:off x="731520" y="1463040"/>
             <a:ext cx="5212080" cy="4846320"/>
           </a:xfrm>
-          <a:prstGeom prst="roundRect">
-            <a:avLst>
-              <a:gd name="adj" fmla="val 2500"/>
-            </a:avLst>
+          <a:prstGeom prst="rect">
+            <a:avLst/>
           </a:prstGeom>
           <a:solidFill>
             <a:srgbClr val="FFFFFF"/>
@@ -4582,14 +4621,57 @@
       </p:sp>
       <p:sp>
         <p:nvSpPr>
-          <p:cNvPr id="7" name="TextBox 6"/>
+          <p:cNvPr id="7" name="Rectangle 6"/>
+          <p:cNvSpPr/>
+          <p:nvPr/>
+        </p:nvSpPr>
+        <p:spPr>
+          <a:xfrm>
+            <a:off x="731520" y="1463040"/>
+            <a:ext cx="5212080" cy="36576"/>
+          </a:xfrm>
+          <a:prstGeom prst="rect">
+            <a:avLst/>
+          </a:prstGeom>
+          <a:solidFill>
+            <a:srgbClr val="0284C7"/>
+          </a:solidFill>
+          <a:ln>
+            <a:noFill/>
+          </a:ln>
+        </p:spPr>
+        <p:style>
+          <a:lnRef idx="1">
+            <a:schemeClr val="accent1"/>
+          </a:lnRef>
+          <a:fillRef idx="3">
+            <a:schemeClr val="accent1"/>
+          </a:fillRef>
+          <a:effectRef idx="2">
+            <a:schemeClr val="accent1"/>
+          </a:effectRef>
+          <a:fontRef idx="minor">
+            <a:schemeClr val="lt1"/>
+          </a:fontRef>
+        </p:style>
+        <p:txBody>
+          <a:bodyPr rtlCol="0" anchor="ctr"/>
+          <a:lstStyle/>
+          <a:p>
+            <a:pPr algn="ctr"/>
+          </a:p>
+        </p:txBody>
+      </p:sp>
+      <p:sp>
+        <p:nvSpPr>
+          <p:cNvPr id="8" name="TextBox 7"/>
           <p:cNvSpPr txBox="1"/>
           <p:nvPr/>
         </p:nvSpPr>
         <p:spPr>
           <a:xfrm>
-            <a:off x="932688" y="1627632"/>
-            <a:ext cx="4809744" cy="4517136"/>
+            <a:off x="960120" y="1600200"/>
+            <a:ext cx="4754880" cy="4572000"/>
           </a:xfrm>
           <a:prstGeom prst="rect">
             <a:avLst/>
@@ -4604,7 +4686,7 @@
           <a:p>
             <a:pPr>
               <a:spcAft>
-                <a:spcPts val="300"/>
+                <a:spcPts val="200"/>
               </a:spcAft>
               <a:defRPr sz="1400" b="1">
                 <a:solidFill>
@@ -4613,7 +4695,7 @@
               </a:defRPr>
             </a:pPr>
             <a:r>
-              <a:t>Kế Hoạch Công Tác Tuần Tới (Week 08)</a:t>
+              <a:t>Upcoming Sprint Plan (Week 08)</a:t>
             </a:r>
           </a:p>
           <a:p>
@@ -4621,14 +4703,14 @@
               <a:spcAft>
                 <a:spcPts val="800"/>
               </a:spcAft>
-              <a:defRPr sz="1000">
+              <a:defRPr sz="950" i="1">
                 <a:solidFill>
                   <a:srgbClr val="64748B"/>
                 </a:solidFill>
               </a:defRPr>
             </a:pPr>
             <a:r>
-              <a:t>Kiểm thử chịu tải nặng và gia cố độ bền hệ thống</a:t>
+              <a:t>Heavy-load stress testing and environmental perception hardening</a:t>
             </a:r>
           </a:p>
           <a:p>
@@ -4643,7 +4725,7 @@
                   <a:srgbClr val="0F2B48"/>
                 </a:solidFill>
               </a:rPr>
-              <a:t>Gia Cố Mắt Thần Thị Giác: </a:t>
+              <a:t>Perception Hardening: </a:t>
             </a:r>
             <a:r>
               <a:rPr sz="1100">
@@ -4651,7 +4733,7 @@
                   <a:srgbClr val="1E293B"/>
                 </a:solidFill>
               </a:rPr>
-              <a:t>Kiểm thử thị giác máy dưới các điều kiện ánh sáng phức tạp, bóng râm thay đổi và bụi bẩn để bảo đảm nhận diện thông suốt 24/7.</a:t>
+              <a:t>Stress-test computer vision under extreme lighting conditions, sudden shadows, and dust to ensure 24/7 uninterrupted recognition.</a:t>
             </a:r>
           </a:p>
           <a:p>
@@ -4666,7 +4748,7 @@
                   <a:srgbClr val="0F2B48"/>
                 </a:solidFill>
               </a:rPr>
-              <a:t>Kiểm Tra Hành Lang An Toàn Tĩnh: </a:t>
+              <a:t>Static Obstacle Corridor Validation: </a:t>
             </a:r>
             <a:r>
               <a:rPr sz="1100">
@@ -4674,7 +4756,7 @@
                   <a:srgbClr val="1E293B"/>
                 </a:solidFill>
               </a:rPr>
-              <a:t>Tối ưu hóa khoảng cách bay an toàn vượt qua các tấm vách mica bảo vệ và tủ điều khiển của robot.</a:t>
+              <a:t>Rigorously verify clearance margins over acrylic safety shields and the UR10e robot controller cabinet.</a:t>
             </a:r>
           </a:p>
           <a:p>
@@ -4689,7 +4771,7 @@
                   <a:srgbClr val="0F2B48"/>
                 </a:solidFill>
               </a:rPr>
-              <a:t>Thực Nghiệm Độ Bền 50 Kiện Hàng: </a:t>
+              <a:t>50-Trial High-Speed Endurance Run: </a:t>
             </a:r>
             <a:r>
               <a:rPr sz="1100">
@@ -4697,7 +4779,7 @@
                   <a:srgbClr val="1E293B"/>
                 </a:solidFill>
               </a:rPr>
-              <a:t>Tăng tốc độ băng tải từ 0.2m/s lên 0.4m/s để kiểm tra độ dẻo dai của robot ở công suất tối đa.</a:t>
+              <a:t>Increase conveyor speed from 0.2m/s to 0.4m/s to validate robot reliability under full production capacity.</a:t>
             </a:r>
           </a:p>
           <a:p>
@@ -4712,7 +4794,7 @@
                   <a:srgbClr val="0F2B48"/>
                 </a:solidFill>
               </a:rPr>
-              <a:t>Đóng Gói Công Cụ Vận Hành: </a:t>
+              <a:t>Client Deployment Packaging: </a:t>
             </a:r>
             <a:r>
               <a:rPr sz="1100">
@@ -4720,14 +4802,14 @@
                   <a:srgbClr val="059669"/>
                 </a:solidFill>
               </a:rPr>
-              <a:t>Chuẩn bị sẵn bộ công cụ khởi động 1-chạm và hệ thống ghi nhật ký tự động phục vụ nghiệm thu.</a:t>
-            </a:r>
-          </a:p>
-        </p:txBody>
-      </p:sp>
-      <p:sp>
-        <p:nvSpPr>
-          <p:cNvPr id="8" name="Rounded Rectangle 7"/>
+              <a:t>Finalize one-click startup scripts, automated health diagnostics, and production logging tools.</a:t>
+            </a:r>
+          </a:p>
+        </p:txBody>
+      </p:sp>
+      <p:sp>
+        <p:nvSpPr>
+          <p:cNvPr id="9" name="Rectangle 8"/>
           <p:cNvSpPr/>
           <p:nvPr/>
         </p:nvSpPr>
@@ -4736,10 +4818,8 @@
             <a:off x="6217920" y="1463040"/>
             <a:ext cx="5212080" cy="4846320"/>
           </a:xfrm>
-          <a:prstGeom prst="roundRect">
-            <a:avLst>
-              <a:gd name="adj" fmla="val 2500"/>
-            </a:avLst>
+          <a:prstGeom prst="rect">
+            <a:avLst/>
           </a:prstGeom>
           <a:solidFill>
             <a:srgbClr val="FFFFFF"/>
@@ -4774,14 +4854,57 @@
       </p:sp>
       <p:sp>
         <p:nvSpPr>
-          <p:cNvPr id="9" name="TextBox 8"/>
+          <p:cNvPr id="10" name="Rectangle 9"/>
+          <p:cNvSpPr/>
+          <p:nvPr/>
+        </p:nvSpPr>
+        <p:spPr>
+          <a:xfrm>
+            <a:off x="6217920" y="1463040"/>
+            <a:ext cx="5212080" cy="36576"/>
+          </a:xfrm>
+          <a:prstGeom prst="rect">
+            <a:avLst/>
+          </a:prstGeom>
+          <a:solidFill>
+            <a:srgbClr val="0284C7"/>
+          </a:solidFill>
+          <a:ln>
+            <a:noFill/>
+          </a:ln>
+        </p:spPr>
+        <p:style>
+          <a:lnRef idx="1">
+            <a:schemeClr val="accent1"/>
+          </a:lnRef>
+          <a:fillRef idx="3">
+            <a:schemeClr val="accent1"/>
+          </a:fillRef>
+          <a:effectRef idx="2">
+            <a:schemeClr val="accent1"/>
+          </a:effectRef>
+          <a:fontRef idx="minor">
+            <a:schemeClr val="lt1"/>
+          </a:fontRef>
+        </p:style>
+        <p:txBody>
+          <a:bodyPr rtlCol="0" anchor="ctr"/>
+          <a:lstStyle/>
+          <a:p>
+            <a:pPr algn="ctr"/>
+          </a:p>
+        </p:txBody>
+      </p:sp>
+      <p:sp>
+        <p:nvSpPr>
+          <p:cNvPr id="11" name="TextBox 10"/>
           <p:cNvSpPr txBox="1"/>
           <p:nvPr/>
         </p:nvSpPr>
         <p:spPr>
           <a:xfrm>
-            <a:off x="6419088" y="1627632"/>
-            <a:ext cx="4809744" cy="4517136"/>
+            <a:off x="6446520" y="1600200"/>
+            <a:ext cx="4754880" cy="4572000"/>
           </a:xfrm>
           <a:prstGeom prst="rect">
             <a:avLst/>
@@ -4796,7 +4919,7 @@
           <a:p>
             <a:pPr>
               <a:spcAft>
-                <a:spcPts val="300"/>
+                <a:spcPts val="200"/>
               </a:spcAft>
               <a:defRPr sz="1400" b="1">
                 <a:solidFill>
@@ -4805,7 +4928,7 @@
               </a:defRPr>
             </a:pPr>
             <a:r>
-              <a:t>Lộ Trình Bàn Giao Tổng Thể (Weeks 08 -&gt; 14)</a:t>
+              <a:t>Master Delivery Roadmap (Weeks 08 -&gt; 14)</a:t>
             </a:r>
           </a:p>
           <a:p>
@@ -4813,14 +4936,14 @@
               <a:spcAft>
                 <a:spcPts val="800"/>
               </a:spcAft>
-              <a:defRPr sz="1000">
+              <a:defRPr sz="950" i="1">
                 <a:solidFill>
                   <a:srgbClr val="64748B"/>
                 </a:solidFill>
               </a:defRPr>
             </a:pPr>
             <a:r>
-              <a:t>Cam kết tiến độ bàn giao sản phẩm hoàn chỉnh</a:t>
+              <a:t>Milestone timeline committed per project scope specification</a:t>
             </a:r>
           </a:p>
           <a:p>
@@ -4835,7 +4958,7 @@
                   <a:srgbClr val="0F2B48"/>
                 </a:solidFill>
               </a:rPr>
-              <a:t>Tuần 08 (Tuần tới): </a:t>
+              <a:t>Week 08 (Upcoming Sprint): </a:t>
             </a:r>
             <a:r>
               <a:rPr sz="1100">
@@ -4843,7 +4966,7 @@
                   <a:srgbClr val="1E293B"/>
                 </a:solidFill>
               </a:rPr>
-              <a:t>Hoàn tất kiểm thử tải nặng 50 kiện hàng liên tục và tinh chỉnh thị giác máy thích ứng đa môi trường.</a:t>
+              <a:t>50-trial high-speed endurance testing and multi-environment machine vision tuning.</a:t>
             </a:r>
           </a:p>
           <a:p>
@@ -4858,7 +4981,7 @@
                   <a:srgbClr val="0F2B48"/>
                 </a:solidFill>
               </a:rPr>
-              <a:t>Tuần 09: </a:t>
+              <a:t>Week 09: </a:t>
             </a:r>
             <a:r>
               <a:rPr sz="1100">
@@ -4866,7 +4989,7 @@
                   <a:srgbClr val="1E293B"/>
                 </a:solidFill>
               </a:rPr>
-              <a:t>Hoàn thiện Sổ tay vận hành (Runbook), video chứng minh và bộ hồ sơ kỹ thuật nghiệm thu cho khách hàng.</a:t>
+              <a:t>Operational Runbook finalization, video showcase compilation, and client technical documentation.</a:t>
             </a:r>
           </a:p>
           <a:p>
@@ -4881,7 +5004,7 @@
                   <a:srgbClr val="0F2B48"/>
                 </a:solidFill>
               </a:rPr>
-              <a:t>Tuần 10 (Nghiệm Thu Milestone 2): </a:t>
+              <a:t>Week 10 (Milestone 2 Formal Defense): </a:t>
             </a:r>
             <a:r>
               <a:rPr sz="1100">
@@ -4889,7 +5012,7 @@
                   <a:srgbClr val="0F2B48"/>
                 </a:solidFill>
               </a:rPr>
-              <a:t>Bảo vệ chính thức toàn diện hệ thống: Băng tải + Phân loại màu + Thị giác thông minh + Né vật cản tĩnh.</a:t>
+              <a:t>Full formal defense: Conveyor + Color Sorting + Machine Vision + Static Obstacle Avoidance.</a:t>
             </a:r>
           </a:p>
           <a:p>
@@ -4904,7 +5027,7 @@
                   <a:srgbClr val="0F2B48"/>
                 </a:solidFill>
               </a:rPr>
-              <a:t>Tuần 11 - 14 (Chặng Milestone 3): </a:t>
+              <a:t>Weeks 11 - 14 (Milestone 3 Track): </a:t>
             </a:r>
             <a:r>
               <a:rPr sz="1100">
@@ -4912,7 +5035,7 @@
                   <a:srgbClr val="1E293B"/>
                 </a:solidFill>
               </a:rPr>
-              <a:t>Nâng cấp tính năng phản ứng né vật cản chuyển động cắt ngang (Dynamic Obstacle Avoidance).</a:t>
+              <a:t>Dynamic Obstacle Avoidance (real-time trajectory replanning around moving barriers).</a:t>
             </a:r>
           </a:p>
         </p:txBody>
@@ -5054,7 +5177,7 @@
               </a:defRPr>
             </a:pPr>
             <a:r>
-              <a:t>TỔNG KẾT GIÁ TRỊ</a:t>
+              <a:t>BUSINESS VALUE &amp; Q&amp;A</a:t>
             </a:r>
           </a:p>
           <a:p>
@@ -5066,7 +5189,7 @@
               </a:defRPr>
             </a:pPr>
             <a:r>
-              <a:t>Hiệu Quả Đầu Tư (ROI) &amp; Giải Đáp Thắc Mắc Cùng Khách Hàng</a:t>
+              <a:t>Return on Investment (ROI) &amp; Interactive Demonstration</a:t>
             </a:r>
           </a:p>
         </p:txBody>
@@ -5080,7 +5203,7 @@
         <p:spPr>
           <a:xfrm>
             <a:off x="10515600" y="228600"/>
-            <a:ext cx="1097280" cy="594360"/>
+            <a:ext cx="1097280" cy="548640"/>
           </a:xfrm>
           <a:prstGeom prst="rect">
             <a:avLst/>
@@ -5094,7 +5217,7 @@
           <a:lstStyle/>
           <a:p>
             <a:pPr algn="r">
-              <a:defRPr sz="1300" b="1">
+              <a:defRPr sz="1400" b="1">
                 <a:solidFill>
                   <a:srgbClr val="0284C7"/>
                 </a:solidFill>
@@ -5108,7 +5231,7 @@
       </p:sp>
       <p:sp>
         <p:nvSpPr>
-          <p:cNvPr id="6" name="Rounded Rectangle 5"/>
+          <p:cNvPr id="6" name="Rectangle 5"/>
           <p:cNvSpPr/>
           <p:nvPr/>
         </p:nvSpPr>
@@ -5117,10 +5240,8 @@
             <a:off x="731520" y="1463040"/>
             <a:ext cx="5212080" cy="4846320"/>
           </a:xfrm>
-          <a:prstGeom prst="roundRect">
-            <a:avLst>
-              <a:gd name="adj" fmla="val 2500"/>
-            </a:avLst>
+          <a:prstGeom prst="rect">
+            <a:avLst/>
           </a:prstGeom>
           <a:solidFill>
             <a:srgbClr val="FFFFFF"/>
@@ -5155,14 +5276,57 @@
       </p:sp>
       <p:sp>
         <p:nvSpPr>
-          <p:cNvPr id="7" name="TextBox 6"/>
+          <p:cNvPr id="7" name="Rectangle 6"/>
+          <p:cNvSpPr/>
+          <p:nvPr/>
+        </p:nvSpPr>
+        <p:spPr>
+          <a:xfrm>
+            <a:off x="731520" y="1463040"/>
+            <a:ext cx="5212080" cy="36576"/>
+          </a:xfrm>
+          <a:prstGeom prst="rect">
+            <a:avLst/>
+          </a:prstGeom>
+          <a:solidFill>
+            <a:srgbClr val="0284C7"/>
+          </a:solidFill>
+          <a:ln>
+            <a:noFill/>
+          </a:ln>
+        </p:spPr>
+        <p:style>
+          <a:lnRef idx="1">
+            <a:schemeClr val="accent1"/>
+          </a:lnRef>
+          <a:fillRef idx="3">
+            <a:schemeClr val="accent1"/>
+          </a:fillRef>
+          <a:effectRef idx="2">
+            <a:schemeClr val="accent1"/>
+          </a:effectRef>
+          <a:fontRef idx="minor">
+            <a:schemeClr val="lt1"/>
+          </a:fontRef>
+        </p:style>
+        <p:txBody>
+          <a:bodyPr rtlCol="0" anchor="ctr"/>
+          <a:lstStyle/>
+          <a:p>
+            <a:pPr algn="ctr"/>
+          </a:p>
+        </p:txBody>
+      </p:sp>
+      <p:sp>
+        <p:nvSpPr>
+          <p:cNvPr id="8" name="TextBox 7"/>
           <p:cNvSpPr txBox="1"/>
           <p:nvPr/>
         </p:nvSpPr>
         <p:spPr>
           <a:xfrm>
-            <a:off x="932688" y="1627632"/>
-            <a:ext cx="4809744" cy="4517136"/>
+            <a:off x="960120" y="1600200"/>
+            <a:ext cx="4754880" cy="4572000"/>
           </a:xfrm>
           <a:prstGeom prst="rect">
             <a:avLst/>
@@ -5177,7 +5341,7 @@
           <a:p>
             <a:pPr>
               <a:spcAft>
-                <a:spcPts val="300"/>
+                <a:spcPts val="200"/>
               </a:spcAft>
               <a:defRPr sz="1400" b="1">
                 <a:solidFill>
@@ -5186,7 +5350,7 @@
               </a:defRPr>
             </a:pPr>
             <a:r>
-              <a:t>Giá Trị Kinh Tế Mang Lại Cho Doanh Nghiệp</a:t>
+              <a:t>Tangible Economic &amp; Operational Value</a:t>
             </a:r>
           </a:p>
           <a:p>
@@ -5194,14 +5358,14 @@
               <a:spcAft>
                 <a:spcPts val="800"/>
               </a:spcAft>
-              <a:defRPr sz="1000">
+              <a:defRPr sz="950" i="1">
                 <a:solidFill>
                   <a:srgbClr val="64748B"/>
                 </a:solidFill>
               </a:defRPr>
             </a:pPr>
             <a:r>
-              <a:t>Lợi thế cạnh tranh vượt trội khi đưa vào sản xuất thực tế</a:t>
+              <a:t>Competitive advantages delivered upon deployment in industrial facilities</a:t>
             </a:r>
           </a:p>
           <a:p>
@@ -5216,7 +5380,7 @@
                   <a:srgbClr val="0F2B48"/>
                 </a:solidFill>
               </a:rPr>
-              <a:t>Tăng Nhanh Tốc Độ Hoàn Vốn (ROI): </a:t>
+              <a:t>Accelerated Capital Payback (ROI): </a:t>
             </a:r>
             <a:r>
               <a:rPr sz="1100">
@@ -5224,7 +5388,7 @@
                   <a:srgbClr val="059669"/>
                 </a:solidFill>
               </a:rPr>
-              <a:t>Năng suất phân loại tăng gần gấp đôi (13.3s thay vì 25s), giúp nhà máy gia tăng sản lượng với chi phí nhân công tối thiểu.</a:t>
+              <a:t>47% cycle time drop (13.3s vs 25.0s) nearly doubles sorting capacity per shift, driving rapid capital amortization.</a:t>
             </a:r>
           </a:p>
           <a:p>
@@ -5239,7 +5403,7 @@
                   <a:srgbClr val="0F2B48"/>
                 </a:solidFill>
               </a:rPr>
-              <a:t>Tiết Kiệm Chi Phí Bảo Trì: </a:t>
+              <a:t>Reduced Maintenance &amp; Extended Life: </a:t>
             </a:r>
             <a:r>
               <a:rPr sz="1100">
@@ -5247,7 +5411,7 @@
                   <a:srgbClr val="059669"/>
                 </a:solidFill>
               </a:rPr>
-              <a:t>Quỹ đạo lượn sóng liên tục giúp động cơ và hộp số robot hoạt động êm ái, kéo dài vòng đời cơ khí lên 30-40%.</a:t>
+              <a:t>Jerk-free continuous motion eliminates mechanical torque spikes, extending UR10e joint and gearbox life by 30-40%.</a:t>
             </a:r>
           </a:p>
           <a:p>
@@ -5262,7 +5426,7 @@
                   <a:srgbClr val="0F2B48"/>
                 </a:solidFill>
               </a:rPr>
-              <a:t>An Toàn Chuẩn Công Nghiệp: </a:t>
+              <a:t>Certified Machine Safety: </a:t>
             </a:r>
             <a:r>
               <a:rPr sz="1100">
@@ -5270,7 +5434,7 @@
                   <a:srgbClr val="059669"/>
                 </a:solidFill>
               </a:rPr>
-              <a:t>Vách bảo hộ mica kết hợp cơ chế nhấc bốc bổng chống va chạm bảo vệ 100% sự nguyên vẹn của hàng hóa và thiết bị.</a:t>
+              <a:t>Acrylic safety barriers combined with 0.2s rapid escape lifts ensure 100% protection for equipment and inventory.</a:t>
             </a:r>
           </a:p>
           <a:p>
@@ -5285,7 +5449,7 @@
                   <a:srgbClr val="0F2B48"/>
                 </a:solidFill>
               </a:rPr>
-              <a:t>Vận Hành Đơn Giản, Thân Thiện: </a:t>
+              <a:t>Simple Operator Ergonomics: </a:t>
             </a:r>
             <a:r>
               <a:rPr sz="1100">
@@ -5293,14 +5457,14 @@
                   <a:srgbClr val="059669"/>
                 </a:solidFill>
               </a:rPr>
-              <a:t>Giám sát trực quan với bộ 3 góc camera chuyên nghiệp, khởi động chỉ với 1 thao tác bấm.</a:t>
-            </a:r>
-          </a:p>
-        </p:txBody>
-      </p:sp>
-      <p:sp>
-        <p:nvSpPr>
-          <p:cNvPr id="8" name="Rounded Rectangle 7"/>
+              <a:t>Real-time 3-camera supervisory HUD and 1-click startup allow swift floor worker onboarding with zero complexity.</a:t>
+            </a:r>
+          </a:p>
+        </p:txBody>
+      </p:sp>
+      <p:sp>
+        <p:nvSpPr>
+          <p:cNvPr id="9" name="Rectangle 8"/>
           <p:cNvSpPr/>
           <p:nvPr/>
         </p:nvSpPr>
@@ -5309,10 +5473,8 @@
             <a:off x="6217920" y="1463040"/>
             <a:ext cx="5212080" cy="4846320"/>
           </a:xfrm>
-          <a:prstGeom prst="roundRect">
-            <a:avLst>
-              <a:gd name="adj" fmla="val 2500"/>
-            </a:avLst>
+          <a:prstGeom prst="rect">
+            <a:avLst/>
           </a:prstGeom>
           <a:solidFill>
             <a:srgbClr val="FFFFFF"/>
@@ -5347,14 +5509,57 @@
       </p:sp>
       <p:sp>
         <p:nvSpPr>
-          <p:cNvPr id="9" name="TextBox 8"/>
+          <p:cNvPr id="10" name="Rectangle 9"/>
+          <p:cNvSpPr/>
+          <p:nvPr/>
+        </p:nvSpPr>
+        <p:spPr>
+          <a:xfrm>
+            <a:off x="6217920" y="1463040"/>
+            <a:ext cx="5212080" cy="36576"/>
+          </a:xfrm>
+          <a:prstGeom prst="rect">
+            <a:avLst/>
+          </a:prstGeom>
+          <a:solidFill>
+            <a:srgbClr val="0284C7"/>
+          </a:solidFill>
+          <a:ln>
+            <a:noFill/>
+          </a:ln>
+        </p:spPr>
+        <p:style>
+          <a:lnRef idx="1">
+            <a:schemeClr val="accent1"/>
+          </a:lnRef>
+          <a:fillRef idx="3">
+            <a:schemeClr val="accent1"/>
+          </a:fillRef>
+          <a:effectRef idx="2">
+            <a:schemeClr val="accent1"/>
+          </a:effectRef>
+          <a:fontRef idx="minor">
+            <a:schemeClr val="lt1"/>
+          </a:fontRef>
+        </p:style>
+        <p:txBody>
+          <a:bodyPr rtlCol="0" anchor="ctr"/>
+          <a:lstStyle/>
+          <a:p>
+            <a:pPr algn="ctr"/>
+          </a:p>
+        </p:txBody>
+      </p:sp>
+      <p:sp>
+        <p:nvSpPr>
+          <p:cNvPr id="11" name="TextBox 10"/>
           <p:cNvSpPr txBox="1"/>
           <p:nvPr/>
         </p:nvSpPr>
         <p:spPr>
           <a:xfrm>
-            <a:off x="6419088" y="1627632"/>
-            <a:ext cx="4809744" cy="4517136"/>
+            <a:off x="6446520" y="1600200"/>
+            <a:ext cx="4754880" cy="4572000"/>
           </a:xfrm>
           <a:prstGeom prst="rect">
             <a:avLst/>
@@ -5369,7 +5574,7 @@
           <a:p>
             <a:pPr>
               <a:spcAft>
-                <a:spcPts val="300"/>
+                <a:spcPts val="200"/>
               </a:spcAft>
               <a:defRPr sz="1400" b="1">
                 <a:solidFill>
@@ -5378,7 +5583,7 @@
               </a:defRPr>
             </a:pPr>
             <a:r>
-              <a:t>Cam Kết Chất Lượng &amp; Trao Đổi Cùng Khách Hàng</a:t>
+              <a:t>Quality Commitment &amp; Interactive Q&amp;A</a:t>
             </a:r>
           </a:p>
           <a:p>
@@ -5386,14 +5591,14 @@
               <a:spcAft>
                 <a:spcPts val="800"/>
               </a:spcAft>
-              <a:defRPr sz="1000">
+              <a:defRPr sz="950" i="1">
                 <a:solidFill>
                   <a:srgbClr val="64748B"/>
                 </a:solidFill>
               </a:defRPr>
             </a:pPr>
             <a:r>
-              <a:t>Sẵn sàng giải đáp chi tiết và trình diễn thực tế</a:t>
+              <a:t>Open floor for technical discussion and live simulation demo</a:t>
             </a:r>
           </a:p>
           <a:p>
@@ -5408,7 +5613,7 @@
                   <a:srgbClr val="0F2B48"/>
                 </a:solidFill>
               </a:rPr>
-              <a:t>Khả Năng Tái Lập 100%: </a:t>
+              <a:t>100% Turnkey Reproducibility: </a:t>
             </a:r>
             <a:r>
               <a:rPr sz="1100">
@@ -5416,7 +5621,7 @@
                   <a:srgbClr val="1E293B"/>
                 </a:solidFill>
               </a:rPr>
-              <a:t>Hệ thống được đóng gói tự động hóa hoàn toàn, dễ dàng triển khai và sao chép trên nhiều dây chuyền.</a:t>
+              <a:t>Fully automated software architecture packaged for seamless replication across multiple factory workcells.</a:t>
             </a:r>
           </a:p>
           <a:p>
@@ -5431,7 +5636,7 @@
                   <a:srgbClr val="0F2B48"/>
                 </a:solidFill>
               </a:rPr>
-              <a:t>Kiểm Thử Thực Nghiệm Nghiêm Ngặt: </a:t>
+              <a:t>Rigorously Measured Field Data: </a:t>
             </a:r>
             <a:r>
               <a:rPr sz="1100">
@@ -5439,7 +5644,7 @@
                   <a:srgbClr val="1E293B"/>
                 </a:solidFill>
               </a:rPr>
-              <a:t>Mọi thông số đều được chứng minh bằng số liệu đo đạc thực tế, không dựa trên lý thuyết suông.</a:t>
+              <a:t>All performance benchmarks are backed by empirical measurement logs, not theoretical assumptions.</a:t>
             </a:r>
           </a:p>
           <a:p>
@@ -5454,7 +5659,7 @@
                   <a:srgbClr val="0F2B48"/>
                 </a:solidFill>
               </a:rPr>
-              <a:t>Đúng Hạn Tiến Độ: </a:t>
+              <a:t>Strict Milestone Adherence: </a:t>
             </a:r>
             <a:r>
               <a:rPr sz="1100">
@@ -5462,7 +5667,7 @@
                   <a:srgbClr val="0F2B48"/>
                 </a:solidFill>
               </a:rPr>
-              <a:t>Hệ thống vận hành đúng tiến độ và sẵn sàng cho đợt nghiệm thu Milestone 2 tại Tuần 10.</a:t>
+              <a:t>Engineering progress is strictly on schedule for formal Milestone 2 commissioning in Week 10.</a:t>
             </a:r>
           </a:p>
           <a:p>
@@ -5477,7 +5682,7 @@
                   <a:srgbClr val="0F2B48"/>
                 </a:solidFill>
               </a:rPr>
-              <a:t>Sẵn Sàng Trao Đổi: </a:t>
+              <a:t>Interactive Discussion &amp; Live Demo: </a:t>
             </a:r>
             <a:r>
               <a:rPr sz="1100">
@@ -5485,7 +5690,7 @@
                   <a:srgbClr val="1E293B"/>
                 </a:solidFill>
               </a:rPr>
-              <a:t>Kính mời Quý Khách hàng và Ban Giám khảo đặt câu hỏi và theo dõi phần trình diễn trực tiếp trên mô hình 3D!</a:t>
+              <a:t>We warmly welcome all questions and invite the board to experience the live 3D digital twin demonstration!</a:t>
             </a:r>
           </a:p>
         </p:txBody>
@@ -5627,7 +5832,7 @@
               </a:defRPr>
             </a:pPr>
             <a:r>
-              <a:t>LỘ TRÌNH BÁO CÁO</a:t>
+              <a:t>EXECUTIVE ROADMAP</a:t>
             </a:r>
           </a:p>
           <a:p>
@@ -5639,7 +5844,7 @@
               </a:defRPr>
             </a:pPr>
             <a:r>
-              <a:t>Nội Dung Báo Cáo Giải Pháp Dành Cho Khách Hàng</a:t>
+              <a:t>Client Presentation Outline &amp; Value Delivered</a:t>
             </a:r>
           </a:p>
         </p:txBody>
@@ -5653,7 +5858,7 @@
         <p:spPr>
           <a:xfrm>
             <a:off x="10515600" y="228600"/>
-            <a:ext cx="1097280" cy="594360"/>
+            <a:ext cx="1097280" cy="548640"/>
           </a:xfrm>
           <a:prstGeom prst="rect">
             <a:avLst/>
@@ -5667,7 +5872,7 @@
           <a:lstStyle/>
           <a:p>
             <a:pPr algn="r">
-              <a:defRPr sz="1300" b="1">
+              <a:defRPr sz="1400" b="1">
                 <a:solidFill>
                   <a:srgbClr val="0284C7"/>
                 </a:solidFill>
@@ -5681,7 +5886,7 @@
       </p:sp>
       <p:sp>
         <p:nvSpPr>
-          <p:cNvPr id="6" name="Rounded Rectangle 5"/>
+          <p:cNvPr id="6" name="Rectangle 5"/>
           <p:cNvSpPr/>
           <p:nvPr/>
         </p:nvSpPr>
@@ -5690,10 +5895,8 @@
             <a:off x="731520" y="1463040"/>
             <a:ext cx="5212080" cy="1097280"/>
           </a:xfrm>
-          <a:prstGeom prst="roundRect">
-            <a:avLst>
-              <a:gd name="adj" fmla="val 2500"/>
-            </a:avLst>
+          <a:prstGeom prst="rect">
+            <a:avLst/>
           </a:prstGeom>
           <a:solidFill>
             <a:srgbClr val="FFFFFF"/>
@@ -5728,14 +5931,57 @@
       </p:sp>
       <p:sp>
         <p:nvSpPr>
-          <p:cNvPr id="7" name="TextBox 6"/>
+          <p:cNvPr id="7" name="Rectangle 6"/>
+          <p:cNvSpPr/>
+          <p:nvPr/>
+        </p:nvSpPr>
+        <p:spPr>
+          <a:xfrm>
+            <a:off x="731520" y="1463040"/>
+            <a:ext cx="5212080" cy="36576"/>
+          </a:xfrm>
+          <a:prstGeom prst="rect">
+            <a:avLst/>
+          </a:prstGeom>
+          <a:solidFill>
+            <a:srgbClr val="0284C7"/>
+          </a:solidFill>
+          <a:ln>
+            <a:noFill/>
+          </a:ln>
+        </p:spPr>
+        <p:style>
+          <a:lnRef idx="1">
+            <a:schemeClr val="accent1"/>
+          </a:lnRef>
+          <a:fillRef idx="3">
+            <a:schemeClr val="accent1"/>
+          </a:fillRef>
+          <a:effectRef idx="2">
+            <a:schemeClr val="accent1"/>
+          </a:effectRef>
+          <a:fontRef idx="minor">
+            <a:schemeClr val="lt1"/>
+          </a:fontRef>
+        </p:style>
+        <p:txBody>
+          <a:bodyPr rtlCol="0" anchor="ctr"/>
+          <a:lstStyle/>
+          <a:p>
+            <a:pPr algn="ctr"/>
+          </a:p>
+        </p:txBody>
+      </p:sp>
+      <p:sp>
+        <p:nvSpPr>
+          <p:cNvPr id="8" name="TextBox 7"/>
           <p:cNvSpPr txBox="1"/>
           <p:nvPr/>
         </p:nvSpPr>
         <p:spPr>
           <a:xfrm>
-            <a:off x="932688" y="1627632"/>
-            <a:ext cx="4809744" cy="768096"/>
+            <a:off x="960120" y="1600200"/>
+            <a:ext cx="4754880" cy="822960"/>
           </a:xfrm>
           <a:prstGeom prst="rect">
             <a:avLst/>
@@ -5750,7 +5996,7 @@
           <a:p>
             <a:pPr>
               <a:spcAft>
-                <a:spcPts val="300"/>
+                <a:spcPts val="200"/>
               </a:spcAft>
               <a:defRPr sz="1400" b="1">
                 <a:solidFill>
@@ -5759,7 +6005,7 @@
               </a:defRPr>
             </a:pPr>
             <a:r>
-              <a:t>01. Tổng Quan Tiến Độ Dự Án</a:t>
+              <a:t>01. Executive Progress Summary</a:t>
             </a:r>
           </a:p>
           <a:p>
@@ -5767,21 +6013,21 @@
               <a:spcAft>
                 <a:spcPts val="800"/>
               </a:spcAft>
-              <a:defRPr sz="1000">
+              <a:defRPr sz="950" i="1">
                 <a:solidFill>
                   <a:srgbClr val="64748B"/>
                 </a:solidFill>
               </a:defRPr>
             </a:pPr>
             <a:r>
-              <a:t>Cam kết từ giai đoạn trước và kết quả đột phá đạt được hôm nay.</a:t>
-            </a:r>
-          </a:p>
-        </p:txBody>
-      </p:sp>
-      <p:sp>
-        <p:nvSpPr>
-          <p:cNvPr id="8" name="Rounded Rectangle 7"/>
+              <a:t>Core milestones achieved from laboratory prototype to standardized industrial cell.</a:t>
+            </a:r>
+          </a:p>
+        </p:txBody>
+      </p:sp>
+      <p:sp>
+        <p:nvSpPr>
+          <p:cNvPr id="9" name="Rectangle 8"/>
           <p:cNvSpPr/>
           <p:nvPr/>
         </p:nvSpPr>
@@ -5790,10 +6036,8 @@
             <a:off x="731520" y="2670048"/>
             <a:ext cx="5212080" cy="1097280"/>
           </a:xfrm>
-          <a:prstGeom prst="roundRect">
-            <a:avLst>
-              <a:gd name="adj" fmla="val 2500"/>
-            </a:avLst>
+          <a:prstGeom prst="rect">
+            <a:avLst/>
           </a:prstGeom>
           <a:solidFill>
             <a:srgbClr val="FFFFFF"/>
@@ -5828,14 +6072,57 @@
       </p:sp>
       <p:sp>
         <p:nvSpPr>
-          <p:cNvPr id="9" name="TextBox 8"/>
+          <p:cNvPr id="10" name="Rectangle 9"/>
+          <p:cNvSpPr/>
+          <p:nvPr/>
+        </p:nvSpPr>
+        <p:spPr>
+          <a:xfrm>
+            <a:off x="731520" y="2670048"/>
+            <a:ext cx="5212080" cy="36576"/>
+          </a:xfrm>
+          <a:prstGeom prst="rect">
+            <a:avLst/>
+          </a:prstGeom>
+          <a:solidFill>
+            <a:srgbClr val="0284C7"/>
+          </a:solidFill>
+          <a:ln>
+            <a:noFill/>
+          </a:ln>
+        </p:spPr>
+        <p:style>
+          <a:lnRef idx="1">
+            <a:schemeClr val="accent1"/>
+          </a:lnRef>
+          <a:fillRef idx="3">
+            <a:schemeClr val="accent1"/>
+          </a:fillRef>
+          <a:effectRef idx="2">
+            <a:schemeClr val="accent1"/>
+          </a:effectRef>
+          <a:fontRef idx="minor">
+            <a:schemeClr val="lt1"/>
+          </a:fontRef>
+        </p:style>
+        <p:txBody>
+          <a:bodyPr rtlCol="0" anchor="ctr"/>
+          <a:lstStyle/>
+          <a:p>
+            <a:pPr algn="ctr"/>
+          </a:p>
+        </p:txBody>
+      </p:sp>
+      <p:sp>
+        <p:nvSpPr>
+          <p:cNvPr id="11" name="TextBox 10"/>
           <p:cNvSpPr txBox="1"/>
           <p:nvPr/>
         </p:nvSpPr>
         <p:spPr>
           <a:xfrm>
-            <a:off x="932688" y="2834640"/>
-            <a:ext cx="4809744" cy="768096"/>
+            <a:off x="960120" y="2807208"/>
+            <a:ext cx="4754880" cy="822960"/>
           </a:xfrm>
           <a:prstGeom prst="rect">
             <a:avLst/>
@@ -5850,7 +6137,7 @@
           <a:p>
             <a:pPr>
               <a:spcAft>
-                <a:spcPts val="300"/>
+                <a:spcPts val="200"/>
               </a:spcAft>
               <a:defRPr sz="1400" b="1">
                 <a:solidFill>
@@ -5859,7 +6146,7 @@
               </a:defRPr>
             </a:pPr>
             <a:r>
-              <a:t>02. Chuyển Động Lượn Sóng Mượt Mà</a:t>
+              <a:t>02. Smooth Fluid Motion Architecture</a:t>
             </a:r>
           </a:p>
           <a:p>
@@ -5867,21 +6154,21 @@
               <a:spcAft>
                 <a:spcPts val="800"/>
               </a:spcAft>
-              <a:defRPr sz="1000">
+              <a:defRPr sz="950" i="1">
                 <a:solidFill>
                   <a:srgbClr val="64748B"/>
                 </a:solidFill>
               </a:defRPr>
             </a:pPr>
             <a:r>
-              <a:t>Loại bỏ hoàn toàn rung giật, vận hành êm ái, bảo vệ động cơ robot.</a:t>
-            </a:r>
-          </a:p>
-        </p:txBody>
-      </p:sp>
-      <p:sp>
-        <p:nvSpPr>
-          <p:cNvPr id="10" name="Rounded Rectangle 9"/>
+              <a:t>100% elimination of stop-and-go jerks, protecting motor and gearbox longevity.</a:t>
+            </a:r>
+          </a:p>
+        </p:txBody>
+      </p:sp>
+      <p:sp>
+        <p:nvSpPr>
+          <p:cNvPr id="12" name="Rectangle 11"/>
           <p:cNvSpPr/>
           <p:nvPr/>
         </p:nvSpPr>
@@ -5890,10 +6177,8 @@
             <a:off x="731520" y="3877056"/>
             <a:ext cx="5212080" cy="1097280"/>
           </a:xfrm>
-          <a:prstGeom prst="roundRect">
-            <a:avLst>
-              <a:gd name="adj" fmla="val 2500"/>
-            </a:avLst>
+          <a:prstGeom prst="rect">
+            <a:avLst/>
           </a:prstGeom>
           <a:solidFill>
             <a:srgbClr val="FFFFFF"/>
@@ -5928,14 +6213,57 @@
       </p:sp>
       <p:sp>
         <p:nvSpPr>
-          <p:cNvPr id="11" name="TextBox 10"/>
+          <p:cNvPr id="13" name="Rectangle 12"/>
+          <p:cNvSpPr/>
+          <p:nvPr/>
+        </p:nvSpPr>
+        <p:spPr>
+          <a:xfrm>
+            <a:off x="731520" y="3877056"/>
+            <a:ext cx="5212080" cy="36576"/>
+          </a:xfrm>
+          <a:prstGeom prst="rect">
+            <a:avLst/>
+          </a:prstGeom>
+          <a:solidFill>
+            <a:srgbClr val="0284C7"/>
+          </a:solidFill>
+          <a:ln>
+            <a:noFill/>
+          </a:ln>
+        </p:spPr>
+        <p:style>
+          <a:lnRef idx="1">
+            <a:schemeClr val="accent1"/>
+          </a:lnRef>
+          <a:fillRef idx="3">
+            <a:schemeClr val="accent1"/>
+          </a:fillRef>
+          <a:effectRef idx="2">
+            <a:schemeClr val="accent1"/>
+          </a:effectRef>
+          <a:fontRef idx="minor">
+            <a:schemeClr val="lt1"/>
+          </a:fontRef>
+        </p:style>
+        <p:txBody>
+          <a:bodyPr rtlCol="0" anchor="ctr"/>
+          <a:lstStyle/>
+          <a:p>
+            <a:pPr algn="ctr"/>
+          </a:p>
+        </p:txBody>
+      </p:sp>
+      <p:sp>
+        <p:nvSpPr>
+          <p:cNvPr id="14" name="TextBox 13"/>
           <p:cNvSpPr txBox="1"/>
           <p:nvPr/>
         </p:nvSpPr>
         <p:spPr>
           <a:xfrm>
-            <a:off x="932688" y="4041648"/>
-            <a:ext cx="4809744" cy="768096"/>
+            <a:off x="960120" y="4014216"/>
+            <a:ext cx="4754880" cy="822960"/>
           </a:xfrm>
           <a:prstGeom prst="rect">
             <a:avLst/>
@@ -5950,7 +6278,7 @@
           <a:p>
             <a:pPr>
               <a:spcAft>
-                <a:spcPts val="300"/>
+                <a:spcPts val="200"/>
               </a:spcAft>
               <a:defRPr sz="1400" b="1">
                 <a:solidFill>
@@ -5959,7 +6287,7 @@
               </a:defRPr>
             </a:pPr>
             <a:r>
-              <a:t>03. Nhấc Thoát Hiểm Chớp Nhoáng (0.2s)</a:t>
+              <a:t>03. Rapid Escape Lift &amp; Flow Acceleration</a:t>
             </a:r>
           </a:p>
           <a:p>
@@ -5967,21 +6295,21 @@
               <a:spcAft>
                 <a:spcPts val="800"/>
               </a:spcAft>
-              <a:defRPr sz="1000">
+              <a:defRPr sz="950" i="1">
                 <a:solidFill>
                   <a:srgbClr val="64748B"/>
                 </a:solidFill>
               </a:defRPr>
             </a:pPr>
             <a:r>
-              <a:t>Giải quyết triệt để va chạm, bảo đảm dòng hàng lưu thông liên tục.</a:t>
-            </a:r>
-          </a:p>
-        </p:txBody>
-      </p:sp>
-      <p:sp>
-        <p:nvSpPr>
-          <p:cNvPr id="12" name="Rounded Rectangle 11"/>
+              <a:t>0.2s vertical lift resolving queue collisions and accelerating sorting speed.</a:t>
+            </a:r>
+          </a:p>
+        </p:txBody>
+      </p:sp>
+      <p:sp>
+        <p:nvSpPr>
+          <p:cNvPr id="15" name="Rectangle 14"/>
           <p:cNvSpPr/>
           <p:nvPr/>
         </p:nvSpPr>
@@ -5990,10 +6318,8 @@
             <a:off x="731520" y="5084064"/>
             <a:ext cx="5212080" cy="1097280"/>
           </a:xfrm>
-          <a:prstGeom prst="roundRect">
-            <a:avLst>
-              <a:gd name="adj" fmla="val 2500"/>
-            </a:avLst>
+          <a:prstGeom prst="rect">
+            <a:avLst/>
           </a:prstGeom>
           <a:solidFill>
             <a:srgbClr val="FFFFFF"/>
@@ -6028,14 +6354,57 @@
       </p:sp>
       <p:sp>
         <p:nvSpPr>
-          <p:cNvPr id="13" name="TextBox 12"/>
+          <p:cNvPr id="16" name="Rectangle 15"/>
+          <p:cNvSpPr/>
+          <p:nvPr/>
+        </p:nvSpPr>
+        <p:spPr>
+          <a:xfrm>
+            <a:off x="731520" y="5084064"/>
+            <a:ext cx="5212080" cy="36576"/>
+          </a:xfrm>
+          <a:prstGeom prst="rect">
+            <a:avLst/>
+          </a:prstGeom>
+          <a:solidFill>
+            <a:srgbClr val="0284C7"/>
+          </a:solidFill>
+          <a:ln>
+            <a:noFill/>
+          </a:ln>
+        </p:spPr>
+        <p:style>
+          <a:lnRef idx="1">
+            <a:schemeClr val="accent1"/>
+          </a:lnRef>
+          <a:fillRef idx="3">
+            <a:schemeClr val="accent1"/>
+          </a:fillRef>
+          <a:effectRef idx="2">
+            <a:schemeClr val="accent1"/>
+          </a:effectRef>
+          <a:fontRef idx="minor">
+            <a:schemeClr val="lt1"/>
+          </a:fontRef>
+        </p:style>
+        <p:txBody>
+          <a:bodyPr rtlCol="0" anchor="ctr"/>
+          <a:lstStyle/>
+          <a:p>
+            <a:pPr algn="ctr"/>
+          </a:p>
+        </p:txBody>
+      </p:sp>
+      <p:sp>
+        <p:nvSpPr>
+          <p:cNvPr id="17" name="TextBox 16"/>
           <p:cNvSpPr txBox="1"/>
           <p:nvPr/>
         </p:nvSpPr>
         <p:spPr>
           <a:xfrm>
-            <a:off x="932688" y="5248656"/>
-            <a:ext cx="4809744" cy="768096"/>
+            <a:off x="960120" y="5221224"/>
+            <a:ext cx="4754880" cy="822960"/>
           </a:xfrm>
           <a:prstGeom prst="rect">
             <a:avLst/>
@@ -6050,7 +6419,7 @@
           <a:p>
             <a:pPr>
               <a:spcAft>
-                <a:spcPts val="300"/>
+                <a:spcPts val="200"/>
               </a:spcAft>
               <a:defRPr sz="1400" b="1">
                 <a:solidFill>
@@ -6059,7 +6428,7 @@
               </a:defRPr>
             </a:pPr>
             <a:r>
-              <a:t>04. Cơ Cấu Kẹp Ôm Sát Tự Nắn Phẳng</a:t>
+              <a:t>04. Self-Centering Grasp &amp; Camera HUD</a:t>
             </a:r>
           </a:p>
           <a:p>
@@ -6067,21 +6436,21 @@
               <a:spcAft>
                 <a:spcPts val="800"/>
               </a:spcAft>
-              <a:defRPr sz="1000">
+              <a:defRPr sz="950" i="1">
                 <a:solidFill>
                   <a:srgbClr val="64748B"/>
                 </a:solidFill>
               </a:defRPr>
             </a:pPr>
             <a:r>
-              <a:t>Phanh dừng chính xác X=0m, tự động căn giữa và ép phẳng kiện hàng.</a:t>
-            </a:r>
-          </a:p>
-        </p:txBody>
-      </p:sp>
-      <p:sp>
-        <p:nvSpPr>
-          <p:cNvPr id="14" name="Rounded Rectangle 13"/>
+              <a:t>Precision electro-mechanical braking at X=0m, auto-squaring gripper pads, 3 views.</a:t>
+            </a:r>
+          </a:p>
+        </p:txBody>
+      </p:sp>
+      <p:sp>
+        <p:nvSpPr>
+          <p:cNvPr id="18" name="Rectangle 17"/>
           <p:cNvSpPr/>
           <p:nvPr/>
         </p:nvSpPr>
@@ -6090,10 +6459,8 @@
             <a:off x="6217920" y="1463040"/>
             <a:ext cx="5212080" cy="1097280"/>
           </a:xfrm>
-          <a:prstGeom prst="roundRect">
-            <a:avLst>
-              <a:gd name="adj" fmla="val 2500"/>
-            </a:avLst>
+          <a:prstGeom prst="rect">
+            <a:avLst/>
           </a:prstGeom>
           <a:solidFill>
             <a:srgbClr val="FFFFFF"/>
@@ -6128,14 +6495,57 @@
       </p:sp>
       <p:sp>
         <p:nvSpPr>
-          <p:cNvPr id="15" name="TextBox 14"/>
+          <p:cNvPr id="19" name="Rectangle 18"/>
+          <p:cNvSpPr/>
+          <p:nvPr/>
+        </p:nvSpPr>
+        <p:spPr>
+          <a:xfrm>
+            <a:off x="6217920" y="1463040"/>
+            <a:ext cx="5212080" cy="36576"/>
+          </a:xfrm>
+          <a:prstGeom prst="rect">
+            <a:avLst/>
+          </a:prstGeom>
+          <a:solidFill>
+            <a:srgbClr val="0284C7"/>
+          </a:solidFill>
+          <a:ln>
+            <a:noFill/>
+          </a:ln>
+        </p:spPr>
+        <p:style>
+          <a:lnRef idx="1">
+            <a:schemeClr val="accent1"/>
+          </a:lnRef>
+          <a:fillRef idx="3">
+            <a:schemeClr val="accent1"/>
+          </a:fillRef>
+          <a:effectRef idx="2">
+            <a:schemeClr val="accent1"/>
+          </a:effectRef>
+          <a:fontRef idx="minor">
+            <a:schemeClr val="lt1"/>
+          </a:fontRef>
+        </p:style>
+        <p:txBody>
+          <a:bodyPr rtlCol="0" anchor="ctr"/>
+          <a:lstStyle/>
+          <a:p>
+            <a:pPr algn="ctr"/>
+          </a:p>
+        </p:txBody>
+      </p:sp>
+      <p:sp>
+        <p:nvSpPr>
+          <p:cNvPr id="20" name="TextBox 19"/>
           <p:cNvSpPr txBox="1"/>
           <p:nvPr/>
         </p:nvSpPr>
         <p:spPr>
           <a:xfrm>
-            <a:off x="6419088" y="1627632"/>
-            <a:ext cx="4809744" cy="768096"/>
+            <a:off x="6446520" y="1600200"/>
+            <a:ext cx="4754880" cy="822960"/>
           </a:xfrm>
           <a:prstGeom prst="rect">
             <a:avLst/>
@@ -6150,7 +6560,7 @@
           <a:p>
             <a:pPr>
               <a:spcAft>
-                <a:spcPts val="300"/>
+                <a:spcPts val="200"/>
               </a:spcAft>
               <a:defRPr sz="1400" b="1">
                 <a:solidFill>
@@ -6159,7 +6569,7 @@
               </a:defRPr>
             </a:pPr>
             <a:r>
-              <a:t>05. Xóa Bỏ Điểm Mù Cánh Tay</a:t>
+              <a:t>05. Eliminating Arm Blind Spots</a:t>
             </a:r>
           </a:p>
           <a:p>
@@ -6167,21 +6577,21 @@
               <a:spcAft>
                 <a:spcPts val="800"/>
               </a:spcAft>
-              <a:defRPr sz="1000">
+              <a:defRPr sz="950" i="1">
                 <a:solidFill>
                   <a:srgbClr val="64748B"/>
                 </a:solidFill>
               </a:defRPr>
             </a:pPr>
             <a:r>
-              <a:t>Khắc phục nhược điểm camera trên trần bị che khuất bằng góc nhìn đối xứng.</a:t>
-            </a:r>
-          </a:p>
-        </p:txBody>
-      </p:sp>
-      <p:sp>
-        <p:nvSpPr>
-          <p:cNvPr id="16" name="Rounded Rectangle 15"/>
+              <a:t>Overcoming overhead ceiling camera obstruction via innovative mirrored tilted perspective.</a:t>
+            </a:r>
+          </a:p>
+        </p:txBody>
+      </p:sp>
+      <p:sp>
+        <p:nvSpPr>
+          <p:cNvPr id="21" name="Rectangle 20"/>
           <p:cNvSpPr/>
           <p:nvPr/>
         </p:nvSpPr>
@@ -6190,10 +6600,8 @@
             <a:off x="6217920" y="2670048"/>
             <a:ext cx="5212080" cy="1097280"/>
           </a:xfrm>
-          <a:prstGeom prst="roundRect">
-            <a:avLst>
-              <a:gd name="adj" fmla="val 2500"/>
-            </a:avLst>
+          <a:prstGeom prst="rect">
+            <a:avLst/>
           </a:prstGeom>
           <a:solidFill>
             <a:srgbClr val="FFFFFF"/>
@@ -6228,14 +6636,57 @@
       </p:sp>
       <p:sp>
         <p:nvSpPr>
-          <p:cNvPr id="17" name="TextBox 16"/>
+          <p:cNvPr id="22" name="Rectangle 21"/>
+          <p:cNvSpPr/>
+          <p:nvPr/>
+        </p:nvSpPr>
+        <p:spPr>
+          <a:xfrm>
+            <a:off x="6217920" y="2670048"/>
+            <a:ext cx="5212080" cy="36576"/>
+          </a:xfrm>
+          <a:prstGeom prst="rect">
+            <a:avLst/>
+          </a:prstGeom>
+          <a:solidFill>
+            <a:srgbClr val="0284C7"/>
+          </a:solidFill>
+          <a:ln>
+            <a:noFill/>
+          </a:ln>
+        </p:spPr>
+        <p:style>
+          <a:lnRef idx="1">
+            <a:schemeClr val="accent1"/>
+          </a:lnRef>
+          <a:fillRef idx="3">
+            <a:schemeClr val="accent1"/>
+          </a:fillRef>
+          <a:effectRef idx="2">
+            <a:schemeClr val="accent1"/>
+          </a:effectRef>
+          <a:fontRef idx="minor">
+            <a:schemeClr val="lt1"/>
+          </a:fontRef>
+        </p:style>
+        <p:txBody>
+          <a:bodyPr rtlCol="0" anchor="ctr"/>
+          <a:lstStyle/>
+          <a:p>
+            <a:pPr algn="ctr"/>
+          </a:p>
+        </p:txBody>
+      </p:sp>
+      <p:sp>
+        <p:nvSpPr>
+          <p:cNvPr id="23" name="TextBox 22"/>
           <p:cNvSpPr txBox="1"/>
           <p:nvPr/>
         </p:nvSpPr>
         <p:spPr>
           <a:xfrm>
-            <a:off x="6419088" y="2834640"/>
-            <a:ext cx="4809744" cy="768096"/>
+            <a:off x="6446520" y="2807208"/>
+            <a:ext cx="4754880" cy="822960"/>
           </a:xfrm>
           <a:prstGeom prst="rect">
             <a:avLst/>
@@ -6250,7 +6701,7 @@
           <a:p>
             <a:pPr>
               <a:spcAft>
-                <a:spcPts val="300"/>
+                <a:spcPts val="200"/>
               </a:spcAft>
               <a:defRPr sz="1400" b="1">
                 <a:solidFill>
@@ -6259,7 +6710,7 @@
               </a:defRPr>
             </a:pPr>
             <a:r>
-              <a:t>06. Mắt Thần Thị Giác AI Góc Nghiêng</a:t>
+              <a:t>06. Industrial Tilted Inspection Station</a:t>
             </a:r>
           </a:p>
           <a:p>
@@ -6267,21 +6718,21 @@
               <a:spcAft>
                 <a:spcPts val="800"/>
               </a:spcAft>
-              <a:defRPr sz="1000">
+              <a:defRPr sz="950" i="1">
                 <a:solidFill>
                   <a:srgbClr val="64748B"/>
                 </a:solidFill>
               </a:defRPr>
             </a:pPr>
             <a:r>
-              <a:t>Thiết kế trạm quét độc quyền, nhìn rõ cả mặt trên và mặt trước kiện hàng.</a:t>
-            </a:r>
-          </a:p>
-        </p:txBody>
-      </p:sp>
-      <p:sp>
-        <p:nvSpPr>
-          <p:cNvPr id="18" name="Rounded Rectangle 17"/>
+              <a:t>Rigid steel tower, simultaneous dual-face capture, and real-time PiP monitoring.</a:t>
+            </a:r>
+          </a:p>
+        </p:txBody>
+      </p:sp>
+      <p:sp>
+        <p:nvSpPr>
+          <p:cNvPr id="24" name="Rectangle 23"/>
           <p:cNvSpPr/>
           <p:nvPr/>
         </p:nvSpPr>
@@ -6290,10 +6741,8 @@
             <a:off x="6217920" y="3877056"/>
             <a:ext cx="5212080" cy="1097280"/>
           </a:xfrm>
-          <a:prstGeom prst="roundRect">
-            <a:avLst>
-              <a:gd name="adj" fmla="val 2500"/>
-            </a:avLst>
+          <a:prstGeom prst="rect">
+            <a:avLst/>
           </a:prstGeom>
           <a:solidFill>
             <a:srgbClr val="FFFFFF"/>
@@ -6328,14 +6777,57 @@
       </p:sp>
       <p:sp>
         <p:nvSpPr>
-          <p:cNvPr id="19" name="TextBox 18"/>
+          <p:cNvPr id="25" name="Rectangle 24"/>
+          <p:cNvSpPr/>
+          <p:nvPr/>
+        </p:nvSpPr>
+        <p:spPr>
+          <a:xfrm>
+            <a:off x="6217920" y="3877056"/>
+            <a:ext cx="5212080" cy="36576"/>
+          </a:xfrm>
+          <a:prstGeom prst="rect">
+            <a:avLst/>
+          </a:prstGeom>
+          <a:solidFill>
+            <a:srgbClr val="0284C7"/>
+          </a:solidFill>
+          <a:ln>
+            <a:noFill/>
+          </a:ln>
+        </p:spPr>
+        <p:style>
+          <a:lnRef idx="1">
+            <a:schemeClr val="accent1"/>
+          </a:lnRef>
+          <a:fillRef idx="3">
+            <a:schemeClr val="accent1"/>
+          </a:fillRef>
+          <a:effectRef idx="2">
+            <a:schemeClr val="accent1"/>
+          </a:effectRef>
+          <a:fontRef idx="minor">
+            <a:schemeClr val="lt1"/>
+          </a:fontRef>
+        </p:style>
+        <p:txBody>
+          <a:bodyPr rtlCol="0" anchor="ctr"/>
+          <a:lstStyle/>
+          <a:p>
+            <a:pPr algn="ctr"/>
+          </a:p>
+        </p:txBody>
+      </p:sp>
+      <p:sp>
+        <p:nvSpPr>
+          <p:cNvPr id="26" name="TextBox 25"/>
           <p:cNvSpPr txBox="1"/>
           <p:nvPr/>
         </p:nvSpPr>
         <p:spPr>
           <a:xfrm>
-            <a:off x="6419088" y="4041648"/>
-            <a:ext cx="4809744" cy="768096"/>
+            <a:off x="6446520" y="4014216"/>
+            <a:ext cx="4754880" cy="822960"/>
           </a:xfrm>
           <a:prstGeom prst="rect">
             <a:avLst/>
@@ -6350,7 +6842,7 @@
           <a:p>
             <a:pPr>
               <a:spcAft>
-                <a:spcPts val="300"/>
+                <a:spcPts val="200"/>
               </a:spcAft>
               <a:defRPr sz="1400" b="1">
                 <a:solidFill>
@@ -6359,7 +6851,7 @@
               </a:defRPr>
             </a:pPr>
             <a:r>
-              <a:t>07. Minh Chứng Hiệu Quả 25 Lần Chạy</a:t>
+              <a:t>07. Empirical 25-Trial Verification</a:t>
             </a:r>
           </a:p>
           <a:p>
@@ -6367,21 +6859,21 @@
               <a:spcAft>
                 <a:spcPts val="800"/>
               </a:spcAft>
-              <a:defRPr sz="1000">
+              <a:defRPr sz="950" i="1">
                 <a:solidFill>
                   <a:srgbClr val="64748B"/>
                 </a:solidFill>
               </a:defRPr>
             </a:pPr>
             <a:r>
-              <a:t>Dữ liệu thực tế: Năng suất tăng 47%, 100% thành công, 0 sự cố va chạm.</a:t>
-            </a:r>
-          </a:p>
-        </p:txBody>
-      </p:sp>
-      <p:sp>
-        <p:nvSpPr>
-          <p:cNvPr id="20" name="Rounded Rectangle 19"/>
+              <a:t>Field-proven performance: 47% speedup, 100% success rate, 0 collision incidents.</a:t>
+            </a:r>
+          </a:p>
+        </p:txBody>
+      </p:sp>
+      <p:sp>
+        <p:nvSpPr>
+          <p:cNvPr id="27" name="Rectangle 26"/>
           <p:cNvSpPr/>
           <p:nvPr/>
         </p:nvSpPr>
@@ -6390,10 +6882,8 @@
             <a:off x="6217920" y="5084064"/>
             <a:ext cx="5212080" cy="1097280"/>
           </a:xfrm>
-          <a:prstGeom prst="roundRect">
-            <a:avLst>
-              <a:gd name="adj" fmla="val 2500"/>
-            </a:avLst>
+          <a:prstGeom prst="rect">
+            <a:avLst/>
           </a:prstGeom>
           <a:solidFill>
             <a:srgbClr val="FFFFFF"/>
@@ -6428,14 +6918,57 @@
       </p:sp>
       <p:sp>
         <p:nvSpPr>
-          <p:cNvPr id="21" name="TextBox 20"/>
+          <p:cNvPr id="28" name="Rectangle 27"/>
+          <p:cNvSpPr/>
+          <p:nvPr/>
+        </p:nvSpPr>
+        <p:spPr>
+          <a:xfrm>
+            <a:off x="6217920" y="5084064"/>
+            <a:ext cx="5212080" cy="36576"/>
+          </a:xfrm>
+          <a:prstGeom prst="rect">
+            <a:avLst/>
+          </a:prstGeom>
+          <a:solidFill>
+            <a:srgbClr val="0284C7"/>
+          </a:solidFill>
+          <a:ln>
+            <a:noFill/>
+          </a:ln>
+        </p:spPr>
+        <p:style>
+          <a:lnRef idx="1">
+            <a:schemeClr val="accent1"/>
+          </a:lnRef>
+          <a:fillRef idx="3">
+            <a:schemeClr val="accent1"/>
+          </a:fillRef>
+          <a:effectRef idx="2">
+            <a:schemeClr val="accent1"/>
+          </a:effectRef>
+          <a:fontRef idx="minor">
+            <a:schemeClr val="lt1"/>
+          </a:fontRef>
+        </p:style>
+        <p:txBody>
+          <a:bodyPr rtlCol="0" anchor="ctr"/>
+          <a:lstStyle/>
+          <a:p>
+            <a:pPr algn="ctr"/>
+          </a:p>
+        </p:txBody>
+      </p:sp>
+      <p:sp>
+        <p:nvSpPr>
+          <p:cNvPr id="29" name="TextBox 28"/>
           <p:cNvSpPr txBox="1"/>
           <p:nvPr/>
         </p:nvSpPr>
         <p:spPr>
           <a:xfrm>
-            <a:off x="6419088" y="5248656"/>
-            <a:ext cx="4809744" cy="768096"/>
+            <a:off x="6446520" y="5221224"/>
+            <a:ext cx="4754880" cy="822960"/>
           </a:xfrm>
           <a:prstGeom prst="rect">
             <a:avLst/>
@@ -6450,7 +6983,7 @@
           <a:p>
             <a:pPr>
               <a:spcAft>
-                <a:spcPts val="300"/>
+                <a:spcPts val="200"/>
               </a:spcAft>
               <a:defRPr sz="1400" b="1">
                 <a:solidFill>
@@ -6459,7 +6992,7 @@
               </a:defRPr>
             </a:pPr>
             <a:r>
-              <a:t>08. Lộ Trình Hoàn Thiện &amp; Nghiệm Thu</a:t>
+              <a:t>08. Delivery Roadmap to Milestone 2</a:t>
             </a:r>
           </a:p>
           <a:p>
@@ -6467,14 +7000,14 @@
               <a:spcAft>
                 <a:spcPts val="800"/>
               </a:spcAft>
-              <a:defRPr sz="1000">
+              <a:defRPr sz="950" i="1">
                 <a:solidFill>
                   <a:srgbClr val="64748B"/>
                 </a:solidFill>
               </a:defRPr>
             </a:pPr>
             <a:r>
-              <a:t>Kế hoạch kiểm thử tải nặng Tuần 08 và bàn giao Milestone 2 tại Tuần 10.</a:t>
+              <a:t>Week 08 high-load stress testing, Week 09 runbook finalization, Week 10 defense.</a:t>
             </a:r>
           </a:p>
         </p:txBody>
@@ -6616,7 +7149,7 @@
               </a:defRPr>
             </a:pPr>
             <a:r>
-              <a:t>TỔNG QUAN TIẾN ĐỘ</a:t>
+              <a:t>EXECUTIVE SUMMARY</a:t>
             </a:r>
           </a:p>
           <a:p>
@@ -6628,7 +7161,7 @@
               </a:defRPr>
             </a:pPr>
             <a:r>
-              <a:t>Những Bước Nhảy Vọt Nổi Bật (Week 06 -&gt; Week 07)</a:t>
+              <a:t>Quantum Leap in Performance &amp; Robustness (Week 06 -&gt; Week 07)</a:t>
             </a:r>
           </a:p>
         </p:txBody>
@@ -6642,7 +7175,7 @@
         <p:spPr>
           <a:xfrm>
             <a:off x="10515600" y="228600"/>
-            <a:ext cx="1097280" cy="594360"/>
+            <a:ext cx="1097280" cy="548640"/>
           </a:xfrm>
           <a:prstGeom prst="rect">
             <a:avLst/>
@@ -6656,7 +7189,7 @@
           <a:lstStyle/>
           <a:p>
             <a:pPr algn="r">
-              <a:defRPr sz="1300" b="1">
+              <a:defRPr sz="1400" b="1">
                 <a:solidFill>
                   <a:srgbClr val="0284C7"/>
                 </a:solidFill>
@@ -6670,7 +7203,7 @@
       </p:sp>
       <p:sp>
         <p:nvSpPr>
-          <p:cNvPr id="6" name="Rounded Rectangle 5"/>
+          <p:cNvPr id="6" name="Rectangle 5"/>
           <p:cNvSpPr/>
           <p:nvPr/>
         </p:nvSpPr>
@@ -6679,10 +7212,8 @@
             <a:off x="731520" y="1463040"/>
             <a:ext cx="5212080" cy="4846320"/>
           </a:xfrm>
-          <a:prstGeom prst="roundRect">
-            <a:avLst>
-              <a:gd name="adj" fmla="val 2500"/>
-            </a:avLst>
+          <a:prstGeom prst="rect">
+            <a:avLst/>
           </a:prstGeom>
           <a:solidFill>
             <a:srgbClr val="FFFFFF"/>
@@ -6717,14 +7248,57 @@
       </p:sp>
       <p:sp>
         <p:nvSpPr>
-          <p:cNvPr id="7" name="TextBox 6"/>
+          <p:cNvPr id="7" name="Rectangle 6"/>
+          <p:cNvSpPr/>
+          <p:nvPr/>
+        </p:nvSpPr>
+        <p:spPr>
+          <a:xfrm>
+            <a:off x="731520" y="1463040"/>
+            <a:ext cx="5212080" cy="36576"/>
+          </a:xfrm>
+          <a:prstGeom prst="rect">
+            <a:avLst/>
+          </a:prstGeom>
+          <a:solidFill>
+            <a:srgbClr val="0284C7"/>
+          </a:solidFill>
+          <a:ln>
+            <a:noFill/>
+          </a:ln>
+        </p:spPr>
+        <p:style>
+          <a:lnRef idx="1">
+            <a:schemeClr val="accent1"/>
+          </a:lnRef>
+          <a:fillRef idx="3">
+            <a:schemeClr val="accent1"/>
+          </a:fillRef>
+          <a:effectRef idx="2">
+            <a:schemeClr val="accent1"/>
+          </a:effectRef>
+          <a:fontRef idx="minor">
+            <a:schemeClr val="lt1"/>
+          </a:fontRef>
+        </p:style>
+        <p:txBody>
+          <a:bodyPr rtlCol="0" anchor="ctr"/>
+          <a:lstStyle/>
+          <a:p>
+            <a:pPr algn="ctr"/>
+          </a:p>
+        </p:txBody>
+      </p:sp>
+      <p:sp>
+        <p:nvSpPr>
+          <p:cNvPr id="8" name="TextBox 7"/>
           <p:cNvSpPr txBox="1"/>
           <p:nvPr/>
         </p:nvSpPr>
         <p:spPr>
           <a:xfrm>
-            <a:off x="932688" y="1627632"/>
-            <a:ext cx="4809744" cy="4517136"/>
+            <a:off x="960120" y="1600200"/>
+            <a:ext cx="4754880" cy="4572000"/>
           </a:xfrm>
           <a:prstGeom prst="rect">
             <a:avLst/>
@@ -6739,7 +7313,7 @@
           <a:p>
             <a:pPr>
               <a:spcAft>
-                <a:spcPts val="300"/>
+                <a:spcPts val="200"/>
               </a:spcAft>
               <a:defRPr sz="1400" b="1">
                 <a:solidFill>
@@ -6748,7 +7322,7 @@
               </a:defRPr>
             </a:pPr>
             <a:r>
-              <a:t>Thách Thức Cần Giải Quyết</a:t>
+              <a:t>Challenges Identified in Earlier Phase</a:t>
             </a:r>
           </a:p>
           <a:p>
@@ -6756,14 +7330,14 @@
               <a:spcAft>
                 <a:spcPts val="800"/>
               </a:spcAft>
-              <a:defRPr sz="1000">
+              <a:defRPr sz="950" i="1">
                 <a:solidFill>
                   <a:srgbClr val="64748B"/>
                 </a:solidFill>
               </a:defRPr>
             </a:pPr>
             <a:r>
-              <a:t>Các hạn chế được chỉ ra trong đợt đánh giá trước</a:t>
+              <a:t>Operational limitations highlighted during previous reviews</a:t>
             </a:r>
           </a:p>
           <a:p>
@@ -6778,7 +7352,7 @@
                   <a:srgbClr val="0F2B48"/>
                 </a:solidFill>
               </a:rPr>
-              <a:t>Tốc Độ Chưa Tối Ưu: </a:t>
+              <a:t>Sluggish Sorting Speed: </a:t>
             </a:r>
             <a:r>
               <a:rPr sz="1100">
@@ -6786,7 +7360,7 @@
                   <a:srgbClr val="1E293B"/>
                 </a:solidFill>
               </a:rPr>
-              <a:t>Robot dừng nghỉ tới 10 lần trong mỗi chu kỳ khiến thời gian xử lý kéo dài ~25 giây/sản phẩm.</a:t>
+              <a:t>The robot paused at 10 discrete checkpoints per cycle, stretching processing time to ~25 seconds per part.</a:t>
             </a:r>
           </a:p>
           <a:p>
@@ -6801,7 +7375,7 @@
                   <a:srgbClr val="0F2B48"/>
                 </a:solidFill>
               </a:rPr>
-              <a:t>Rủi Ro Va Chạm Băng Tải: </a:t>
+              <a:t>Conveyor Tailgating Hazard: </a:t>
             </a:r>
             <a:r>
               <a:rPr sz="1100">
@@ -6809,7 +7383,7 @@
                   <a:srgbClr val="1E293B"/>
                 </a:solidFill>
               </a:rPr>
-              <a:t>Các kiện hàng phía sau trôi tới dễ đâm vào kiện hàng đang được robot giữ để tính toán.</a:t>
+              <a:t>Incoming upstream workpieces risked colliding with the item held by the robot during motion planning.</a:t>
             </a:r>
           </a:p>
           <a:p>
@@ -6824,7 +7398,7 @@
                   <a:srgbClr val="0F2B48"/>
                 </a:solidFill>
               </a:rPr>
-              <a:t>Điểm Mù Quan Sát: </a:t>
+              <a:t>Vision Camera Occlusion: </a:t>
             </a:r>
             <a:r>
               <a:rPr sz="1100">
@@ -6832,7 +7406,7 @@
                   <a:srgbClr val="1E293B"/>
                 </a:solidFill>
               </a:rPr>
-              <a:t>Camera gắn vuông góc trên trần bị cánh tay cơ khí che khuất đúng lúc chuẩn bị gắp hàng.</a:t>
+              <a:t>Overhead camera mounted directly above the belt was blocked by the descending robot arm links.</a:t>
             </a:r>
           </a:p>
           <a:p>
@@ -6847,7 +7421,7 @@
                   <a:srgbClr val="0F2B48"/>
                 </a:solidFill>
               </a:rPr>
-              <a:t>Độ Ôm Khít Mỏ Kẹp: </a:t>
+              <a:t>Gripper Misalignment: </a:t>
             </a:r>
             <a:r>
               <a:rPr sz="1100">
@@ -6855,14 +7429,14 @@
                   <a:srgbClr val="1E293B"/>
                 </a:solidFill>
               </a:rPr>
-              <a:t>Kiện hàng bị xô lệch nhẹ do quán tính trôi của băng tải và mỏ kẹp chưa tự nắn phẳng.</a:t>
-            </a:r>
-          </a:p>
-        </p:txBody>
-      </p:sp>
-      <p:sp>
-        <p:nvSpPr>
-          <p:cNvPr id="8" name="Rounded Rectangle 7"/>
+              <a:t>Workpieces suffered minor skew due to conveyor coasting, leading to tilted, off-center lifts.</a:t>
+            </a:r>
+          </a:p>
+        </p:txBody>
+      </p:sp>
+      <p:sp>
+        <p:nvSpPr>
+          <p:cNvPr id="9" name="Rectangle 8"/>
           <p:cNvSpPr/>
           <p:nvPr/>
         </p:nvSpPr>
@@ -6871,10 +7445,8 @@
             <a:off x="6217920" y="1463040"/>
             <a:ext cx="5212080" cy="4846320"/>
           </a:xfrm>
-          <a:prstGeom prst="roundRect">
-            <a:avLst>
-              <a:gd name="adj" fmla="val 2500"/>
-            </a:avLst>
+          <a:prstGeom prst="rect">
+            <a:avLst/>
           </a:prstGeom>
           <a:solidFill>
             <a:srgbClr val="FFFFFF"/>
@@ -6909,14 +7481,57 @@
       </p:sp>
       <p:sp>
         <p:nvSpPr>
-          <p:cNvPr id="9" name="TextBox 8"/>
+          <p:cNvPr id="10" name="Rectangle 9"/>
+          <p:cNvSpPr/>
+          <p:nvPr/>
+        </p:nvSpPr>
+        <p:spPr>
+          <a:xfrm>
+            <a:off x="6217920" y="1463040"/>
+            <a:ext cx="5212080" cy="36576"/>
+          </a:xfrm>
+          <a:prstGeom prst="rect">
+            <a:avLst/>
+          </a:prstGeom>
+          <a:solidFill>
+            <a:srgbClr val="0284C7"/>
+          </a:solidFill>
+          <a:ln>
+            <a:noFill/>
+          </a:ln>
+        </p:spPr>
+        <p:style>
+          <a:lnRef idx="1">
+            <a:schemeClr val="accent1"/>
+          </a:lnRef>
+          <a:fillRef idx="3">
+            <a:schemeClr val="accent1"/>
+          </a:fillRef>
+          <a:effectRef idx="2">
+            <a:schemeClr val="accent1"/>
+          </a:effectRef>
+          <a:fontRef idx="minor">
+            <a:schemeClr val="lt1"/>
+          </a:fontRef>
+        </p:style>
+        <p:txBody>
+          <a:bodyPr rtlCol="0" anchor="ctr"/>
+          <a:lstStyle/>
+          <a:p>
+            <a:pPr algn="ctr"/>
+          </a:p>
+        </p:txBody>
+      </p:sp>
+      <p:sp>
+        <p:nvSpPr>
+          <p:cNvPr id="11" name="TextBox 10"/>
           <p:cNvSpPr txBox="1"/>
           <p:nvPr/>
         </p:nvSpPr>
         <p:spPr>
           <a:xfrm>
-            <a:off x="6419088" y="1627632"/>
-            <a:ext cx="4809744" cy="4517136"/>
+            <a:off x="6446520" y="1600200"/>
+            <a:ext cx="4754880" cy="4572000"/>
           </a:xfrm>
           <a:prstGeom prst="rect">
             <a:avLst/>
@@ -6931,7 +7546,7 @@
           <a:p>
             <a:pPr>
               <a:spcAft>
-                <a:spcPts val="300"/>
+                <a:spcPts val="200"/>
               </a:spcAft>
               <a:defRPr sz="1400" b="1">
                 <a:solidFill>
@@ -6940,7 +7555,7 @@
               </a:defRPr>
             </a:pPr>
             <a:r>
-              <a:t>Giải Pháp Đột Phá Đã Hoàn Thiện</a:t>
+              <a:t>Breakthrough Solutions Delivered Today</a:t>
             </a:r>
           </a:p>
           <a:p>
@@ -6948,14 +7563,14 @@
               <a:spcAft>
                 <a:spcPts val="800"/>
               </a:spcAft>
-              <a:defRPr sz="1000">
+              <a:defRPr sz="950" i="1">
                 <a:solidFill>
                   <a:srgbClr val="64748B"/>
                 </a:solidFill>
               </a:defRPr>
             </a:pPr>
             <a:r>
-              <a:t>Đã kiểm chứng thực tế trên mô hình số hóa chuẩn công nghiệp</a:t>
+              <a:t>Empirically verified on standardized industrial digital twin</a:t>
             </a:r>
           </a:p>
           <a:p>
@@ -6970,7 +7585,7 @@
                   <a:srgbClr val="0F2B48"/>
                 </a:solidFill>
               </a:rPr>
-              <a:t>Năng Suất Tăng Gần Gấp Đôi (+47%): </a:t>
+              <a:t>47% Throughput Surge: </a:t>
             </a:r>
             <a:r>
               <a:rPr sz="1100">
@@ -6978,7 +7593,7 @@
                   <a:srgbClr val="059669"/>
                 </a:solidFill>
               </a:rPr>
-              <a:t>Thời gian phân loại rút ngắn ngoạn mục xuống chỉ còn 13.2 - 13.6 giây/kiện hàng.</a:t>
+              <a:t>Sortation cycle time plummeted to 13.2 - 13.6 seconds per item, nearly doubling line throughput.</a:t>
             </a:r>
           </a:p>
           <a:p>
@@ -6993,7 +7608,7 @@
                   <a:srgbClr val="0F2B48"/>
                 </a:solidFill>
               </a:rPr>
-              <a:t>Chuyển Động Lượn Sóng 100%: </a:t>
+              <a:t>Seamless Continuous Motion: </a:t>
             </a:r>
             <a:r>
               <a:rPr sz="1100">
@@ -7001,7 +7616,7 @@
                   <a:srgbClr val="059669"/>
                 </a:solidFill>
               </a:rPr>
-              <a:t>0 lần dừng nghỉ giữa chừng; toàn bộ chu trình là một đường uốn cong mượt mà, êm ái.</a:t>
+              <a:t>0 midway pauses; entire pick-and-place trajectory executes in one uninterrupted fluid curve.</a:t>
             </a:r>
           </a:p>
           <a:p>
@@ -7016,7 +7631,7 @@
                   <a:srgbClr val="0F2B48"/>
                 </a:solidFill>
               </a:rPr>
-              <a:t>Nhấc Thoát Hiểm Trong 0.2s: </a:t>
+              <a:t>0.2s Rapid Escape Lift: </a:t>
             </a:r>
             <a:r>
               <a:rPr sz="1100">
@@ -7024,7 +7639,7 @@
                   <a:srgbClr val="059669"/>
                 </a:solidFill>
               </a:rPr>
-              <a:t>Bốc bổng kiện hàng lên cao ngay lập tức, cách ly hoàn toàn với dòng hàng trôi phía sau.</a:t>
+              <a:t>Hoists workpieces vertically within 0.2s, completely isolating them from incoming belt traffic.</a:t>
             </a:r>
           </a:p>
           <a:p>
@@ -7039,7 +7654,7 @@
                   <a:srgbClr val="0F2B48"/>
                 </a:solidFill>
               </a:rPr>
-              <a:t>Thị Giác Đối Xứng Không Điểm Mù: </a:t>
+              <a:t>Zero-Blind-Spot Tilted Vision: </a:t>
             </a:r>
             <a:r>
               <a:rPr sz="1100">
@@ -7047,7 +7662,7 @@
                   <a:srgbClr val="059669"/>
                 </a:solidFill>
               </a:rPr>
-              <a:t>Camera đặt nghiêng 50° đối diện băng tải, thấy rõ 100% phôi từ lúc xuất hiện đến lúc gắp.</a:t>
+              <a:t>Front-tilted camera setup at 50° maintains 100% unobstructed sightline from arrival to grasp.</a:t>
             </a:r>
           </a:p>
           <a:p>
@@ -7062,7 +7677,7 @@
                   <a:srgbClr val="0F2B48"/>
                 </a:solidFill>
               </a:rPr>
-              <a:t>Mỏ Kẹp Tự Nắn Phẳng Thông Minh: </a:t>
+              <a:t>Self-Centering Parallel Grasp: </a:t>
             </a:r>
             <a:r>
               <a:rPr sz="1100">
@@ -7070,7 +7685,7 @@
                   <a:srgbClr val="059669"/>
                 </a:solidFill>
               </a:rPr>
-              <a:t>Phanh dừng triệt tiêu trượt quán tính; má cao su tự hút phẳng kiện hàng cân đối 100%.</a:t>
+              <a:t>Active braking locks drift; parallel rubber pads snap workpieces into 100% square alignment.</a:t>
             </a:r>
           </a:p>
         </p:txBody>
@@ -7212,7 +7827,7 @@
               </a:defRPr>
             </a:pPr>
             <a:r>
-              <a:t>CÔNG NGHỆ CHUYỂN ĐỘNG</a:t>
+              <a:t>MOTION ARCHITECTURE</a:t>
             </a:r>
           </a:p>
           <a:p>
@@ -7224,7 +7839,7 @@
               </a:defRPr>
             </a:pPr>
             <a:r>
-              <a:t>Chuyển Động Lượn Sóng Mượt Mà — Bảo Vệ Tuổi Thọ Robot</a:t>
+              <a:t>Smooth Fluid Motion Architecture — Protecting Robot Lifespan</a:t>
             </a:r>
           </a:p>
         </p:txBody>
@@ -7238,7 +7853,7 @@
         <p:spPr>
           <a:xfrm>
             <a:off x="10515600" y="228600"/>
-            <a:ext cx="1097280" cy="594360"/>
+            <a:ext cx="1097280" cy="548640"/>
           </a:xfrm>
           <a:prstGeom prst="rect">
             <a:avLst/>
@@ -7252,7 +7867,7 @@
           <a:lstStyle/>
           <a:p>
             <a:pPr algn="r">
-              <a:defRPr sz="1300" b="1">
+              <a:defRPr sz="1400" b="1">
                 <a:solidFill>
                   <a:srgbClr val="0284C7"/>
                 </a:solidFill>
@@ -7266,7 +7881,7 @@
       </p:sp>
       <p:sp>
         <p:nvSpPr>
-          <p:cNvPr id="6" name="Rounded Rectangle 5"/>
+          <p:cNvPr id="6" name="Rectangle 5"/>
           <p:cNvSpPr/>
           <p:nvPr/>
         </p:nvSpPr>
@@ -7275,10 +7890,8 @@
             <a:off x="731520" y="1463040"/>
             <a:ext cx="5212080" cy="2377440"/>
           </a:xfrm>
-          <a:prstGeom prst="roundRect">
-            <a:avLst>
-              <a:gd name="adj" fmla="val 2500"/>
-            </a:avLst>
+          <a:prstGeom prst="rect">
+            <a:avLst/>
           </a:prstGeom>
           <a:solidFill>
             <a:srgbClr val="FFFFFF"/>
@@ -7313,14 +7926,57 @@
       </p:sp>
       <p:sp>
         <p:nvSpPr>
-          <p:cNvPr id="7" name="TextBox 6"/>
+          <p:cNvPr id="7" name="Rectangle 6"/>
+          <p:cNvSpPr/>
+          <p:nvPr/>
+        </p:nvSpPr>
+        <p:spPr>
+          <a:xfrm>
+            <a:off x="731520" y="1463040"/>
+            <a:ext cx="5212080" cy="36576"/>
+          </a:xfrm>
+          <a:prstGeom prst="rect">
+            <a:avLst/>
+          </a:prstGeom>
+          <a:solidFill>
+            <a:srgbClr val="0284C7"/>
+          </a:solidFill>
+          <a:ln>
+            <a:noFill/>
+          </a:ln>
+        </p:spPr>
+        <p:style>
+          <a:lnRef idx="1">
+            <a:schemeClr val="accent1"/>
+          </a:lnRef>
+          <a:fillRef idx="3">
+            <a:schemeClr val="accent1"/>
+          </a:fillRef>
+          <a:effectRef idx="2">
+            <a:schemeClr val="accent1"/>
+          </a:effectRef>
+          <a:fontRef idx="minor">
+            <a:schemeClr val="lt1"/>
+          </a:fontRef>
+        </p:style>
+        <p:txBody>
+          <a:bodyPr rtlCol="0" anchor="ctr"/>
+          <a:lstStyle/>
+          <a:p>
+            <a:pPr algn="ctr"/>
+          </a:p>
+        </p:txBody>
+      </p:sp>
+      <p:sp>
+        <p:nvSpPr>
+          <p:cNvPr id="8" name="TextBox 7"/>
           <p:cNvSpPr txBox="1"/>
           <p:nvPr/>
         </p:nvSpPr>
         <p:spPr>
           <a:xfrm>
-            <a:off x="932688" y="1627632"/>
-            <a:ext cx="4809744" cy="2048256"/>
+            <a:off x="960120" y="1600200"/>
+            <a:ext cx="4754880" cy="2103120"/>
           </a:xfrm>
           <a:prstGeom prst="rect">
             <a:avLst/>
@@ -7335,7 +7991,7 @@
           <a:p>
             <a:pPr>
               <a:spcAft>
-                <a:spcPts val="300"/>
+                <a:spcPts val="200"/>
               </a:spcAft>
               <a:defRPr sz="1400" b="1">
                 <a:solidFill>
@@ -7344,7 +8000,7 @@
               </a:defRPr>
             </a:pPr>
             <a:r>
-              <a:t>Hạn Chế Của Cách Làm Cũ (Dừng Giật Từng Bước)</a:t>
+              <a:t>Conventional Step-by-Step Motion Pitfalls</a:t>
             </a:r>
           </a:p>
           <a:p>
@@ -7352,14 +8008,14 @@
               <a:spcAft>
                 <a:spcPts val="800"/>
               </a:spcAft>
-              <a:defRPr sz="1000">
+              <a:defRPr sz="950" i="1">
                 <a:solidFill>
                   <a:srgbClr val="64748B"/>
                 </a:solidFill>
               </a:defRPr>
             </a:pPr>
             <a:r>
-              <a:t>Chi phí bảo trì cao và lãng phí thời gian</a:t>
+              <a:t>High maintenance costs, structural vibration, and lost cycle time</a:t>
             </a:r>
           </a:p>
           <a:p>
@@ -7374,7 +8030,7 @@
                   <a:srgbClr val="0F2B48"/>
                 </a:solidFill>
               </a:rPr>
-              <a:t>Cách Tiếp Cận Sơ Khai: </a:t>
+              <a:t>Stop-and-Go Paradigm: </a:t>
             </a:r>
             <a:r>
               <a:rPr sz="1100">
@@ -7382,7 +8038,7 @@
                   <a:srgbClr val="1E293B"/>
                 </a:solidFill>
               </a:rPr>
-              <a:t>Robot phải di chuyển theo kiểu 'đi một đoạn - dừng lại kiểm tra': Dừng tiếp cận -&gt; Dừng gắp -&gt; Dừng nhấc -&gt; Dừng xoay -&gt; Dừng thả.</a:t>
+              <a:t>Early robots moved via disjointed waypoints: Approach -&gt; Pause -&gt; Grasp -&gt; Pause -&gt; Lift -&gt; Pause -&gt; Swing -&gt; Pause -&gt; Release.</a:t>
             </a:r>
           </a:p>
           <a:p>
@@ -7397,7 +8053,7 @@
                   <a:srgbClr val="0F2B48"/>
                 </a:solidFill>
               </a:rPr>
-              <a:t>Hao Mòn Cơ Khí: </a:t>
+              <a:t>Mechanical Stress &amp; Wear: </a:t>
             </a:r>
             <a:r>
               <a:rPr sz="1100">
@@ -7405,7 +8061,7 @@
                   <a:srgbClr val="1E293B"/>
                 </a:solidFill>
               </a:rPr>
-              <a:t>Động cơ liên tục phanh gấp rồi tăng tốc đột ngột, gây rung lắc mạnh cánh tay và làm giảm tuổi thọ hộp số.</a:t>
+              <a:t>Actuators repeatedly braked violently and re-accelerated, causing excessive vibration and premature gearbox wear.</a:t>
             </a:r>
           </a:p>
           <a:p>
@@ -7420,7 +8076,7 @@
                   <a:srgbClr val="0F2B48"/>
                 </a:solidFill>
               </a:rPr>
-              <a:t>Thời Gian Lãng Phí: </a:t>
+              <a:t>Severe Cycle Time Penalty: </a:t>
             </a:r>
             <a:r>
               <a:rPr sz="1100">
@@ -7428,14 +8084,14 @@
                   <a:srgbClr val="1E293B"/>
                 </a:solidFill>
               </a:rPr>
-              <a:t>Mỗi lần dừng đỗ làm mất từ 1.5 - 2.5 giây, đẩy thời gian xử lý lên ~25 giây/sản phẩm.</a:t>
-            </a:r>
-          </a:p>
-        </p:txBody>
-      </p:sp>
-      <p:sp>
-        <p:nvSpPr>
-          <p:cNvPr id="8" name="Rounded Rectangle 7"/>
+              <a:t>Each pause wasted 1.5 to 2.5 seconds, ballooning total cycle time to ~25 seconds per workpiece.</a:t>
+            </a:r>
+          </a:p>
+        </p:txBody>
+      </p:sp>
+      <p:sp>
+        <p:nvSpPr>
+          <p:cNvPr id="9" name="Rectangle 8"/>
           <p:cNvSpPr/>
           <p:nvPr/>
         </p:nvSpPr>
@@ -7444,10 +8100,8 @@
             <a:off x="6217920" y="1463040"/>
             <a:ext cx="5212080" cy="2377440"/>
           </a:xfrm>
-          <a:prstGeom prst="roundRect">
-            <a:avLst>
-              <a:gd name="adj" fmla="val 2500"/>
-            </a:avLst>
+          <a:prstGeom prst="rect">
+            <a:avLst/>
           </a:prstGeom>
           <a:solidFill>
             <a:srgbClr val="FFFFFF"/>
@@ -7482,14 +8136,57 @@
       </p:sp>
       <p:sp>
         <p:nvSpPr>
-          <p:cNvPr id="9" name="TextBox 8"/>
+          <p:cNvPr id="10" name="Rectangle 9"/>
+          <p:cNvSpPr/>
+          <p:nvPr/>
+        </p:nvSpPr>
+        <p:spPr>
+          <a:xfrm>
+            <a:off x="6217920" y="1463040"/>
+            <a:ext cx="5212080" cy="36576"/>
+          </a:xfrm>
+          <a:prstGeom prst="rect">
+            <a:avLst/>
+          </a:prstGeom>
+          <a:solidFill>
+            <a:srgbClr val="0284C7"/>
+          </a:solidFill>
+          <a:ln>
+            <a:noFill/>
+          </a:ln>
+        </p:spPr>
+        <p:style>
+          <a:lnRef idx="1">
+            <a:schemeClr val="accent1"/>
+          </a:lnRef>
+          <a:fillRef idx="3">
+            <a:schemeClr val="accent1"/>
+          </a:fillRef>
+          <a:effectRef idx="2">
+            <a:schemeClr val="accent1"/>
+          </a:effectRef>
+          <a:fontRef idx="minor">
+            <a:schemeClr val="lt1"/>
+          </a:fontRef>
+        </p:style>
+        <p:txBody>
+          <a:bodyPr rtlCol="0" anchor="ctr"/>
+          <a:lstStyle/>
+          <a:p>
+            <a:pPr algn="ctr"/>
+          </a:p>
+        </p:txBody>
+      </p:sp>
+      <p:sp>
+        <p:nvSpPr>
+          <p:cNvPr id="11" name="TextBox 10"/>
           <p:cNvSpPr txBox="1"/>
           <p:nvPr/>
         </p:nvSpPr>
         <p:spPr>
           <a:xfrm>
-            <a:off x="6419088" y="1627632"/>
-            <a:ext cx="4809744" cy="2048256"/>
+            <a:off x="6446520" y="1600200"/>
+            <a:ext cx="4754880" cy="2103120"/>
           </a:xfrm>
           <a:prstGeom prst="rect">
             <a:avLst/>
@@ -7504,7 +8201,7 @@
           <a:p>
             <a:pPr>
               <a:spcAft>
-                <a:spcPts val="300"/>
+                <a:spcPts val="200"/>
               </a:spcAft>
               <a:defRPr sz="1400" b="1">
                 <a:solidFill>
@@ -7513,7 +8210,7 @@
               </a:defRPr>
             </a:pPr>
             <a:r>
-              <a:t>Sáng Kiến Quỹ Đạo Lượn Sóng Mượt Mà</a:t>
+              <a:t>Continuous Wave Trajectory Innovation</a:t>
             </a:r>
           </a:p>
           <a:p>
@@ -7521,14 +8218,14 @@
               <a:spcAft>
                 <a:spcPts val="800"/>
               </a:spcAft>
-              <a:defRPr sz="1000">
+              <a:defRPr sz="950" i="1">
                 <a:solidFill>
                   <a:srgbClr val="64748B"/>
                 </a:solidFill>
               </a:defRPr>
             </a:pPr>
             <a:r>
-              <a:t>Tối ưu hóa đường bay liên tục không điểm dừng</a:t>
+              <a:t>Uninterrupted spline curve motion without intermediate stops</a:t>
             </a:r>
           </a:p>
           <a:p>
@@ -7543,7 +8240,7 @@
                   <a:srgbClr val="0F2B48"/>
                 </a:solidFill>
               </a:rPr>
-              <a:t>Nguyên Lý Lượn Sóng: </a:t>
+              <a:t>Continuous Wave Principle: </a:t>
             </a:r>
             <a:r>
               <a:rPr sz="1100">
@@ -7551,7 +8248,7 @@
                   <a:srgbClr val="1E293B"/>
                 </a:solidFill>
               </a:rPr>
-              <a:t>Toàn bộ chu trình tiếp cận, gắp hàng, nhấc lên và đưa vào thùng được kết nối thành một đường cong duy nhất.</a:t>
+              <a:t>Approach, grasp, escape lift, barrier clearance, and bin deposit are synthesized into a single fluid curve.</a:t>
             </a:r>
           </a:p>
           <a:p>
@@ -7566,7 +8263,7 @@
                   <a:srgbClr val="0F2B48"/>
                 </a:solidFill>
               </a:rPr>
-              <a:t>Vận Hành Êm Ái: </a:t>
+              <a:t>Zero-Jerk Execution: </a:t>
             </a:r>
             <a:r>
               <a:rPr sz="1100">
@@ -7574,7 +8271,7 @@
                   <a:srgbClr val="1E293B"/>
                 </a:solidFill>
               </a:rPr>
-              <a:t>Robot lướt qua các điểm mốc với tốc độ ổn định, không dừng lại một tích tắc nào, triệt tiêu hoàn toàn rung lắc.</a:t>
+              <a:t>The arm glides smoothly through transition points at sustained optimal speed, eliminating mechanical shudder.</a:t>
             </a:r>
           </a:p>
           <a:p>
@@ -7589,7 +8286,7 @@
                   <a:srgbClr val="0F2B48"/>
                 </a:solidFill>
               </a:rPr>
-              <a:t>Tiết Kiệm Điện Năng: </a:t>
+              <a:t>Energy &amp; Asset Longevity: </a:t>
             </a:r>
             <a:r>
               <a:rPr sz="1100">
@@ -7597,14 +8294,14 @@
                   <a:srgbClr val="059669"/>
                 </a:solidFill>
               </a:rPr>
-              <a:t>Giảm thiểu dòng khởi động động cơ, tiết kiệm năng lượng tiêu thụ cho toàn bộ xưởng sản xuất.</a:t>
-            </a:r>
-          </a:p>
-        </p:txBody>
-      </p:sp>
-      <p:sp>
-        <p:nvSpPr>
-          <p:cNvPr id="10" name="Rounded Rectangle 9"/>
+              <a:t>Significantly reduces peak electrical current, lowering factory power draw and extending joint life.</a:t>
+            </a:r>
+          </a:p>
+        </p:txBody>
+      </p:sp>
+      <p:sp>
+        <p:nvSpPr>
+          <p:cNvPr id="12" name="Rectangle 11"/>
           <p:cNvSpPr/>
           <p:nvPr/>
         </p:nvSpPr>
@@ -7613,10 +8310,8 @@
             <a:off x="731520" y="3977639"/>
             <a:ext cx="10698480" cy="2331720"/>
           </a:xfrm>
-          <a:prstGeom prst="roundRect">
-            <a:avLst>
-              <a:gd name="adj" fmla="val 2500"/>
-            </a:avLst>
+          <a:prstGeom prst="rect">
+            <a:avLst/>
           </a:prstGeom>
           <a:solidFill>
             <a:srgbClr val="FFFFFF"/>
@@ -7651,14 +8346,57 @@
       </p:sp>
       <p:sp>
         <p:nvSpPr>
-          <p:cNvPr id="11" name="TextBox 10"/>
+          <p:cNvPr id="13" name="Rectangle 12"/>
+          <p:cNvSpPr/>
+          <p:nvPr/>
+        </p:nvSpPr>
+        <p:spPr>
+          <a:xfrm>
+            <a:off x="731520" y="3977639"/>
+            <a:ext cx="10698480" cy="36576"/>
+          </a:xfrm>
+          <a:prstGeom prst="rect">
+            <a:avLst/>
+          </a:prstGeom>
+          <a:solidFill>
+            <a:srgbClr val="0284C7"/>
+          </a:solidFill>
+          <a:ln>
+            <a:noFill/>
+          </a:ln>
+        </p:spPr>
+        <p:style>
+          <a:lnRef idx="1">
+            <a:schemeClr val="accent1"/>
+          </a:lnRef>
+          <a:fillRef idx="3">
+            <a:schemeClr val="accent1"/>
+          </a:fillRef>
+          <a:effectRef idx="2">
+            <a:schemeClr val="accent1"/>
+          </a:effectRef>
+          <a:fontRef idx="minor">
+            <a:schemeClr val="lt1"/>
+          </a:fontRef>
+        </p:style>
+        <p:txBody>
+          <a:bodyPr rtlCol="0" anchor="ctr"/>
+          <a:lstStyle/>
+          <a:p>
+            <a:pPr algn="ctr"/>
+          </a:p>
+        </p:txBody>
+      </p:sp>
+      <p:sp>
+        <p:nvSpPr>
+          <p:cNvPr id="14" name="TextBox 13"/>
           <p:cNvSpPr txBox="1"/>
           <p:nvPr/>
         </p:nvSpPr>
         <p:spPr>
           <a:xfrm>
-            <a:off x="932688" y="4142231"/>
-            <a:ext cx="10296144" cy="2002536"/>
+            <a:off x="960120" y="4114799"/>
+            <a:ext cx="10241280" cy="2057400"/>
           </a:xfrm>
           <a:prstGeom prst="rect">
             <a:avLst/>
@@ -7673,7 +8411,7 @@
           <a:p>
             <a:pPr>
               <a:spcAft>
-                <a:spcPts val="300"/>
+                <a:spcPts val="200"/>
               </a:spcAft>
               <a:defRPr sz="1400" b="1">
                 <a:solidFill>
@@ -7682,7 +8420,7 @@
               </a:defRPr>
             </a:pPr>
             <a:r>
-              <a:t>Cơ Chế Tự Động Giữ Phẳng Cổ Tay: Tránh Vặn Xoắn Dây Cáp &amp; Kẹt Va Chạm</a:t>
+              <a:t>Natural Wrist Leveling: Preventing Cable Twisting &amp; Shield Collisions</a:t>
             </a:r>
           </a:p>
           <a:p>
@@ -7690,14 +8428,14 @@
               <a:spcAft>
                 <a:spcPts val="800"/>
               </a:spcAft>
-              <a:defRPr sz="1000">
+              <a:defRPr sz="950" i="1">
                 <a:solidFill>
                   <a:srgbClr val="64748B"/>
                 </a:solidFill>
               </a:defRPr>
             </a:pPr>
             <a:r>
-              <a:t>Bảo đảm mỏ kẹp luôn hướng thẳng đứng xuống đất ở mọi góc xoay của cánh tay</a:t>
+              <a:t>Maintains the gripper strictly perpendicular to the floor across all arm rotation angles</a:t>
             </a:r>
           </a:p>
           <a:p>
@@ -7712,7 +8450,7 @@
                   <a:srgbClr val="0F2B48"/>
                 </a:solidFill>
               </a:rPr>
-              <a:t>Bài Toán Vặn Cổ Tay: </a:t>
+              <a:t>The Wrist Twisting Hazard: </a:t>
             </a:r>
             <a:r>
               <a:rPr sz="1100">
@@ -7720,7 +8458,7 @@
                   <a:srgbClr val="1E293B"/>
                 </a:solidFill>
               </a:rPr>
-              <a:t>Khi xoay từ băng tải sang các thùng bên cạnh, nếu không tính toán linh hoạt, cổ tay robot sẽ bị vặn ngược tới 160 độ, gây nguy cơ giằng đứt dây cáp và đập vào vách mica bảo vệ.</a:t>
+              <a:t>When rotating from the conveyor to sorting bins, naive planning caused the wrist to counter-rotate up to 160°, risking cable snagging and collisions with acrylic shields.</a:t>
             </a:r>
           </a:p>
           <a:p>
@@ -7735,7 +8473,7 @@
                   <a:srgbClr val="0F2B48"/>
                 </a:solidFill>
               </a:rPr>
-              <a:t>Thuật Toán Cân Bằng Tự Nhiên: </a:t>
+              <a:t>Dynamic Natural Alignment: </a:t>
             </a:r>
             <a:r>
               <a:rPr sz="1100">
@@ -7743,7 +8481,7 @@
                   <a:srgbClr val="1E293B"/>
                 </a:solidFill>
               </a:rPr>
-              <a:t>Hệ thống tự động điều tiết khớp cổ tay xoay bù trừ chính xác theo góc quay của thân robot, giữ mỏ kẹp luôn thẳng đứng vuông góc với mặt đất một cách hoàn toàn tự nhiên.</a:t>
+              <a:t>The system dynamically modulates the wrist rotation to compensate for base yaw in real time, keeping the gripper naturally vertical to the floor at all times.</a:t>
             </a:r>
           </a:p>
           <a:p>
@@ -7758,7 +8496,7 @@
                   <a:srgbClr val="0F2B48"/>
                 </a:solidFill>
               </a:rPr>
-              <a:t>Lợi Ích Thực Tế: </a:t>
+              <a:t>Factory Floor Benefits: </a:t>
             </a:r>
             <a:r>
               <a:rPr sz="1100">
@@ -7766,7 +8504,7 @@
                   <a:srgbClr val="059669"/>
                 </a:solidFill>
               </a:rPr>
-              <a:t>100% hành trình phân loại diễn ra an toàn, dây cáp không bao giờ bị vặn xoắn, triệt tiêu nguy cơ chạm vào vách mica bảo hộ.</a:t>
+              <a:t>100% collision-free transit across all bins, zero cable strain, and guaranteed clearance over protective acrylic shields.</a:t>
             </a:r>
           </a:p>
         </p:txBody>
@@ -7908,7 +8646,7 @@
               </a:defRPr>
             </a:pPr>
             <a:r>
-              <a:t>TỐI ƯU NĂNG SUẤT</a:t>
+              <a:t>THROUGHPUT OPTIMIZATION</a:t>
             </a:r>
           </a:p>
           <a:p>
@@ -7920,7 +8658,7 @@
               </a:defRPr>
             </a:pPr>
             <a:r>
-              <a:t>Cơ Chế Thoát Hiểm Chớp Nhoáng (0.2s) &amp; Tăng Tốc Dòng Hàng</a:t>
+              <a:t>Rapid Escape Lift (0.2s) &amp; Factory Flow Acceleration</a:t>
             </a:r>
           </a:p>
         </p:txBody>
@@ -7934,7 +8672,7 @@
         <p:spPr>
           <a:xfrm>
             <a:off x="10515600" y="228600"/>
-            <a:ext cx="1097280" cy="594360"/>
+            <a:ext cx="1097280" cy="548640"/>
           </a:xfrm>
           <a:prstGeom prst="rect">
             <a:avLst/>
@@ -7948,7 +8686,7 @@
           <a:lstStyle/>
           <a:p>
             <a:pPr algn="r">
-              <a:defRPr sz="1300" b="1">
+              <a:defRPr sz="1400" b="1">
                 <a:solidFill>
                   <a:srgbClr val="0284C7"/>
                 </a:solidFill>
@@ -7962,7 +8700,7 @@
       </p:sp>
       <p:sp>
         <p:nvSpPr>
-          <p:cNvPr id="6" name="Rounded Rectangle 5"/>
+          <p:cNvPr id="6" name="Rectangle 5"/>
           <p:cNvSpPr/>
           <p:nvPr/>
         </p:nvSpPr>
@@ -7971,10 +8709,8 @@
             <a:off x="731520" y="1463040"/>
             <a:ext cx="5212080" cy="4846320"/>
           </a:xfrm>
-          <a:prstGeom prst="roundRect">
-            <a:avLst>
-              <a:gd name="adj" fmla="val 2500"/>
-            </a:avLst>
+          <a:prstGeom prst="rect">
+            <a:avLst/>
           </a:prstGeom>
           <a:solidFill>
             <a:srgbClr val="FFFFFF"/>
@@ -8009,14 +8745,57 @@
       </p:sp>
       <p:sp>
         <p:nvSpPr>
-          <p:cNvPr id="7" name="TextBox 6"/>
+          <p:cNvPr id="7" name="Rectangle 6"/>
+          <p:cNvSpPr/>
+          <p:nvPr/>
+        </p:nvSpPr>
+        <p:spPr>
+          <a:xfrm>
+            <a:off x="731520" y="1463040"/>
+            <a:ext cx="5212080" cy="36576"/>
+          </a:xfrm>
+          <a:prstGeom prst="rect">
+            <a:avLst/>
+          </a:prstGeom>
+          <a:solidFill>
+            <a:srgbClr val="0284C7"/>
+          </a:solidFill>
+          <a:ln>
+            <a:noFill/>
+          </a:ln>
+        </p:spPr>
+        <p:style>
+          <a:lnRef idx="1">
+            <a:schemeClr val="accent1"/>
+          </a:lnRef>
+          <a:fillRef idx="3">
+            <a:schemeClr val="accent1"/>
+          </a:fillRef>
+          <a:effectRef idx="2">
+            <a:schemeClr val="accent1"/>
+          </a:effectRef>
+          <a:fontRef idx="minor">
+            <a:schemeClr val="lt1"/>
+          </a:fontRef>
+        </p:style>
+        <p:txBody>
+          <a:bodyPr rtlCol="0" anchor="ctr"/>
+          <a:lstStyle/>
+          <a:p>
+            <a:pPr algn="ctr"/>
+          </a:p>
+        </p:txBody>
+      </p:sp>
+      <p:sp>
+        <p:nvSpPr>
+          <p:cNvPr id="8" name="TextBox 7"/>
           <p:cNvSpPr txBox="1"/>
           <p:nvPr/>
         </p:nvSpPr>
         <p:spPr>
           <a:xfrm>
-            <a:off x="932688" y="1627632"/>
-            <a:ext cx="4809744" cy="4517136"/>
+            <a:off x="960120" y="1600200"/>
+            <a:ext cx="4754880" cy="4572000"/>
           </a:xfrm>
           <a:prstGeom prst="rect">
             <a:avLst/>
@@ -8031,7 +8810,7 @@
           <a:p>
             <a:pPr>
               <a:spcAft>
-                <a:spcPts val="300"/>
+                <a:spcPts val="200"/>
               </a:spcAft>
               <a:defRPr sz="1400" b="1">
                 <a:solidFill>
@@ -8040,7 +8819,7 @@
               </a:defRPr>
             </a:pPr>
             <a:r>
-              <a:t>Cơ Chế Nhấc Thoát Hiểm Trong 0.2 Giây</a:t>
+              <a:t>Rapid Escape Lift Mechanism (0.2s)</a:t>
             </a:r>
           </a:p>
           <a:p>
@@ -8048,14 +8827,14 @@
               <a:spcAft>
                 <a:spcPts val="800"/>
               </a:spcAft>
-              <a:defRPr sz="1000">
+              <a:defRPr sz="950" i="1">
                 <a:solidFill>
                   <a:srgbClr val="64748B"/>
                 </a:solidFill>
               </a:defRPr>
             </a:pPr>
             <a:r>
-              <a:t>Ngăn chặn tuyệt đối va quẹt giữa các kiện hàng liên tiếp</a:t>
+              <a:t>Completely eliminates tailgating collisions between consecutive workpieces</a:t>
             </a:r>
           </a:p>
           <a:p>
@@ -8070,7 +8849,7 @@
                   <a:srgbClr val="0F2B48"/>
                 </a:solidFill>
               </a:rPr>
-              <a:t>Áp Lực Dòng Hàng: </a:t>
+              <a:t>Conveyor Traffic Pressure: </a:t>
             </a:r>
             <a:r>
               <a:rPr sz="1100">
@@ -8078,7 +8857,7 @@
                   <a:srgbClr val="1E293B"/>
                 </a:solidFill>
               </a:rPr>
-              <a:t>Băng chuyền nhà máy vận hành liên tục với tốc độ 0.3 m/s. Các kiện hàng nối đuôi nhau trôi về trạm gắp.</a:t>
+              <a:t>Industrial conveyors run continuously at 0.3 m/s. Upstream items flow steadily toward the pick cell.</a:t>
             </a:r>
           </a:p>
           <a:p>
@@ -8093,7 +8872,7 @@
                   <a:srgbClr val="0F2B48"/>
                 </a:solidFill>
               </a:rPr>
-              <a:t>Rủi Ro Dây Chuyền Cũ: </a:t>
+              <a:t>Old System Hazard: </a:t>
             </a:r>
             <a:r>
               <a:rPr sz="1100">
@@ -8101,7 +8880,7 @@
                   <a:srgbClr val="1E293B"/>
                 </a:solidFill>
               </a:rPr>
-              <a:t>Sau khi kẹp hàng, nếu robot nằm yên trên mặt băng để tính đường đi, kiện hàng phía sau sẽ lao tới đâm sầm vào kiện đang giữ.</a:t>
+              <a:t>If the robot lingered on the belt surface to compute transfer paths, incoming items would inevitably crash into the gripped part.</a:t>
             </a:r>
           </a:p>
           <a:p>
@@ -8116,7 +8895,7 @@
                   <a:srgbClr val="0F2B48"/>
                 </a:solidFill>
               </a:rPr>
-              <a:t>Thoát Hiểm Chớp Nhoáng: </a:t>
+              <a:t>Instant Hoisting in &lt;0.25s: </a:t>
             </a:r>
             <a:r>
               <a:rPr sz="1100">
@@ -8124,7 +8903,7 @@
                   <a:srgbClr val="1E293B"/>
                 </a:solidFill>
               </a:rPr>
-              <a:t>Ngay khi 2 ngón kẹp vừa khép lại, robot bốc bổng kiện hàng lên cao +16cm chỉ trong &lt; 0.25 giây (tăng tốc gấp 2.4 lần).</a:t>
+              <a:t>The instant gripper fingers clamp, high-speed vertical acceleration lifts the cube +16cm in &lt;0.25s (2.4x acceleration boost).</a:t>
             </a:r>
           </a:p>
           <a:p>
@@ -8139,7 +8918,7 @@
                   <a:srgbClr val="0F2B48"/>
                 </a:solidFill>
               </a:rPr>
-              <a:t>Cách Ly Hoàn Toàn: </a:t>
+              <a:t>Safe Mid-Air Isolation: </a:t>
             </a:r>
             <a:r>
               <a:rPr sz="1100">
@@ -8147,7 +8926,7 @@
                   <a:srgbClr val="1E293B"/>
                 </a:solidFill>
               </a:rPr>
-              <a:t>Kiện hàng được nhấc bổng lên không trung, cách ly tuyệt đối với mặt băng chuyền trước khi robot bắt đầu xoay chuyển.</a:t>
+              <a:t>The workpiece is hoisted into open airspace, cleanly separating it from the conveyor surface before lateral arm rotation begins.</a:t>
             </a:r>
           </a:p>
           <a:p>
@@ -8162,7 +8941,7 @@
                   <a:srgbClr val="0F2B48"/>
                 </a:solidFill>
               </a:rPr>
-              <a:t>Kết Quả Vận Hành: </a:t>
+              <a:t>Zero Flow Disruptions: </a:t>
             </a:r>
             <a:r>
               <a:rPr sz="1100">
@@ -8170,14 +8949,14 @@
                   <a:srgbClr val="059669"/>
                 </a:solidFill>
               </a:rPr>
-              <a:t>Dòng hàng bên dưới tiếp tục trôi thoải mái, 0 sự cố va chạm hàng trên toàn bộ dây chuyền!</a:t>
-            </a:r>
-          </a:p>
-        </p:txBody>
-      </p:sp>
-      <p:sp>
-        <p:nvSpPr>
-          <p:cNvPr id="8" name="Rounded Rectangle 7"/>
+              <a:t>The conveyor queue flows beneath smoothly; 0 collision incidents recorded across all production runs!</a:t>
+            </a:r>
+          </a:p>
+        </p:txBody>
+      </p:sp>
+      <p:sp>
+        <p:nvSpPr>
+          <p:cNvPr id="9" name="Rectangle 8"/>
           <p:cNvSpPr/>
           <p:nvPr/>
         </p:nvSpPr>
@@ -8186,10 +8965,8 @@
             <a:off x="6217920" y="1463040"/>
             <a:ext cx="5212080" cy="4846320"/>
           </a:xfrm>
-          <a:prstGeom prst="roundRect">
-            <a:avLst>
-              <a:gd name="adj" fmla="val 2500"/>
-            </a:avLst>
+          <a:prstGeom prst="rect">
+            <a:avLst/>
           </a:prstGeom>
           <a:solidFill>
             <a:srgbClr val="FFFFFF"/>
@@ -8224,14 +9001,57 @@
       </p:sp>
       <p:sp>
         <p:nvSpPr>
-          <p:cNvPr id="9" name="TextBox 8"/>
+          <p:cNvPr id="10" name="Rectangle 9"/>
+          <p:cNvSpPr/>
+          <p:nvPr/>
+        </p:nvSpPr>
+        <p:spPr>
+          <a:xfrm>
+            <a:off x="6217920" y="1463040"/>
+            <a:ext cx="5212080" cy="36576"/>
+          </a:xfrm>
+          <a:prstGeom prst="rect">
+            <a:avLst/>
+          </a:prstGeom>
+          <a:solidFill>
+            <a:srgbClr val="0284C7"/>
+          </a:solidFill>
+          <a:ln>
+            <a:noFill/>
+          </a:ln>
+        </p:spPr>
+        <p:style>
+          <a:lnRef idx="1">
+            <a:schemeClr val="accent1"/>
+          </a:lnRef>
+          <a:fillRef idx="3">
+            <a:schemeClr val="accent1"/>
+          </a:fillRef>
+          <a:effectRef idx="2">
+            <a:schemeClr val="accent1"/>
+          </a:effectRef>
+          <a:fontRef idx="minor">
+            <a:schemeClr val="lt1"/>
+          </a:fontRef>
+        </p:style>
+        <p:txBody>
+          <a:bodyPr rtlCol="0" anchor="ctr"/>
+          <a:lstStyle/>
+          <a:p>
+            <a:pPr algn="ctr"/>
+          </a:p>
+        </p:txBody>
+      </p:sp>
+      <p:sp>
+        <p:nvSpPr>
+          <p:cNvPr id="11" name="TextBox 10"/>
           <p:cNvSpPr txBox="1"/>
           <p:nvPr/>
         </p:nvSpPr>
         <p:spPr>
           <a:xfrm>
-            <a:off x="6419088" y="1627632"/>
-            <a:ext cx="4809744" cy="4517136"/>
+            <a:off x="6446520" y="1600200"/>
+            <a:ext cx="4754880" cy="4572000"/>
           </a:xfrm>
           <a:prstGeom prst="rect">
             <a:avLst/>
@@ -8246,7 +9066,7 @@
           <a:p>
             <a:pPr>
               <a:spcAft>
-                <a:spcPts val="300"/>
+                <a:spcPts val="200"/>
               </a:spcAft>
               <a:defRPr sz="1400" b="1">
                 <a:solidFill>
@@ -8255,7 +9075,7 @@
               </a:defRPr>
             </a:pPr>
             <a:r>
-              <a:t>Tốc Độ Xử Lý Thực Tế Từng Thùng Hàng</a:t>
+              <a:t>Verified Cycle Time by Destination Bin</a:t>
             </a:r>
           </a:p>
           <a:p>
@@ -8263,14 +9083,14 @@
               <a:spcAft>
                 <a:spcPts val="800"/>
               </a:spcAft>
-              <a:defRPr sz="1000">
+              <a:defRPr sz="950" i="1">
                 <a:solidFill>
                   <a:srgbClr val="64748B"/>
                 </a:solidFill>
               </a:defRPr>
             </a:pPr>
             <a:r>
-              <a:t>Rút ngắn từ 35% đến 47% thời gian cho mỗi sản phẩm</a:t>
+              <a:t>35% to 47% cycle time reduction across all sorting streams</a:t>
             </a:r>
           </a:p>
           <a:p>
@@ -8285,7 +9105,7 @@
                   <a:srgbClr val="0F2B48"/>
                 </a:solidFill>
               </a:rPr>
-              <a:t>Thùng Vàng (Bên phải): </a:t>
+              <a:t>Yellow Bin (Right Stream): </a:t>
             </a:r>
             <a:r>
               <a:rPr sz="1100">
@@ -8293,7 +9113,7 @@
                   <a:srgbClr val="1E293B"/>
                 </a:solidFill>
               </a:rPr>
-              <a:t>Thời gian hoàn thành chỉ 13.36 giây (Rút ngắn 46.5% so với mức 24.95s trước đây). Năng suất tăng gần gấp đôi!</a:t>
+              <a:t>Completed in just 13.36 seconds (46.5% reduction from baseline 24.95s). Factory throughput nearly doubled!</a:t>
             </a:r>
           </a:p>
           <a:p>
@@ -8308,7 +9128,7 @@
                   <a:srgbClr val="0F2B48"/>
                 </a:solidFill>
               </a:rPr>
-              <a:t>Thùng Đỏ (Bên trái): </a:t>
+              <a:t>Red Bin (Left Stream): </a:t>
             </a:r>
             <a:r>
               <a:rPr sz="1100">
@@ -8316,7 +9136,7 @@
                   <a:srgbClr val="1E293B"/>
                 </a:solidFill>
               </a:rPr>
-              <a:t>Thời gian hoàn thành chỉ 13.62 giây (Rút ngắn 35.1% so với mức 21.00s trước đây).</a:t>
+              <a:t>Completed in just 13.62 seconds (35.1% reduction from baseline 21.00s).</a:t>
             </a:r>
           </a:p>
           <a:p>
@@ -8331,7 +9151,7 @@
                   <a:srgbClr val="0F2B48"/>
                 </a:solidFill>
               </a:rPr>
-              <a:t>Thùng Xanh (Phía sau): </a:t>
+              <a:t>Blue Bin (Rear Stream): </a:t>
             </a:r>
             <a:r>
               <a:rPr sz="1100">
@@ -8339,7 +9159,7 @@
                   <a:srgbClr val="1E293B"/>
                 </a:solidFill>
               </a:rPr>
-              <a:t>Hành trình dài xoay 180° vòng qua tủ điều khiển chỉ mất 19.02 giây (Nhanh hơn 41.9% so với mức 32.72s).</a:t>
+              <a:t>Full 180° transfer over control cabinet completed in 19.02 seconds (41.9% reduction from 32.72s).</a:t>
             </a:r>
           </a:p>
           <a:p>
@@ -8354,7 +9174,7 @@
                   <a:srgbClr val="0F2B48"/>
                 </a:solidFill>
               </a:rPr>
-              <a:t>Thời Gian Trung Bình: </a:t>
+              <a:t>Mean Cycle Time: </a:t>
             </a:r>
             <a:r>
               <a:rPr sz="1100">
@@ -8362,7 +9182,7 @@
                   <a:srgbClr val="059669"/>
                 </a:solidFill>
               </a:rPr>
-              <a:t>Giảm từ 25.0 giây xuống chỉ còn 15.68 giây cho mọi vị trí thùng, nâng cao công suất nhà máy thêm ~37%.</a:t>
+              <a:t>Dropped from 25.00s to 15.68s across all bins, expanding facility sorting capacity by ~37%.</a:t>
             </a:r>
           </a:p>
           <a:p>
@@ -8377,7 +9197,7 @@
                   <a:srgbClr val="0F2B48"/>
                 </a:solidFill>
               </a:rPr>
-              <a:t>Vận Hành Trong Ngưỡng: </a:t>
+              <a:t>Safe Motor Parameters: </a:t>
             </a:r>
             <a:r>
               <a:rPr sz="1100">
@@ -8385,7 +9205,7 @@
                   <a:srgbClr val="1E293B"/>
                 </a:solidFill>
               </a:rPr>
-              <a:t>Tốc độ tăng cao nhưng vẫn nằm an toàn trong giới hạn thiết kế của hãng Universal Robots, không gây quá tải động cơ.</a:t>
+              <a:t>All speed boosts operate strictly within Universal Robots manufacturer safety limits, ensuring zero motor overload.</a:t>
             </a:r>
           </a:p>
         </p:txBody>
@@ -8527,7 +9347,7 @@
               </a:defRPr>
             </a:pPr>
             <a:r>
-              <a:t>ĐỘ CHÍNH XÁC &amp; GIÁM SÁT</a:t>
+              <a:t>PRECISION &amp; MONITORING</a:t>
             </a:r>
           </a:p>
           <a:p>
@@ -8539,7 +9359,7 @@
               </a:defRPr>
             </a:pPr>
             <a:r>
-              <a:t>Mỏ Kẹp Tự Nắn Phẳng &amp; Bộ 3 Góc Máy Trình Chiếu Chuyên Nghiệp</a:t>
+              <a:t>Self-Centering Snap Grasp &amp; 3-Angle Operator Supervisory HUD</a:t>
             </a:r>
           </a:p>
         </p:txBody>
@@ -8553,7 +9373,7 @@
         <p:spPr>
           <a:xfrm>
             <a:off x="10515600" y="228600"/>
-            <a:ext cx="1097280" cy="594360"/>
+            <a:ext cx="1097280" cy="548640"/>
           </a:xfrm>
           <a:prstGeom prst="rect">
             <a:avLst/>
@@ -8567,7 +9387,7 @@
           <a:lstStyle/>
           <a:p>
             <a:pPr algn="r">
-              <a:defRPr sz="1300" b="1">
+              <a:defRPr sz="1400" b="1">
                 <a:solidFill>
                   <a:srgbClr val="0284C7"/>
                 </a:solidFill>
@@ -8581,7 +9401,7 @@
       </p:sp>
       <p:sp>
         <p:nvSpPr>
-          <p:cNvPr id="6" name="Rounded Rectangle 5"/>
+          <p:cNvPr id="6" name="Rectangle 5"/>
           <p:cNvSpPr/>
           <p:nvPr/>
         </p:nvSpPr>
@@ -8590,10 +9410,8 @@
             <a:off x="731520" y="1463040"/>
             <a:ext cx="5212080" cy="4846320"/>
           </a:xfrm>
-          <a:prstGeom prst="roundRect">
-            <a:avLst>
-              <a:gd name="adj" fmla="val 2500"/>
-            </a:avLst>
+          <a:prstGeom prst="rect">
+            <a:avLst/>
           </a:prstGeom>
           <a:solidFill>
             <a:srgbClr val="FFFFFF"/>
@@ -8628,14 +9446,57 @@
       </p:sp>
       <p:sp>
         <p:nvSpPr>
-          <p:cNvPr id="7" name="TextBox 6"/>
+          <p:cNvPr id="7" name="Rectangle 6"/>
+          <p:cNvSpPr/>
+          <p:nvPr/>
+        </p:nvSpPr>
+        <p:spPr>
+          <a:xfrm>
+            <a:off x="731520" y="1463040"/>
+            <a:ext cx="5212080" cy="36576"/>
+          </a:xfrm>
+          <a:prstGeom prst="rect">
+            <a:avLst/>
+          </a:prstGeom>
+          <a:solidFill>
+            <a:srgbClr val="0284C7"/>
+          </a:solidFill>
+          <a:ln>
+            <a:noFill/>
+          </a:ln>
+        </p:spPr>
+        <p:style>
+          <a:lnRef idx="1">
+            <a:schemeClr val="accent1"/>
+          </a:lnRef>
+          <a:fillRef idx="3">
+            <a:schemeClr val="accent1"/>
+          </a:fillRef>
+          <a:effectRef idx="2">
+            <a:schemeClr val="accent1"/>
+          </a:effectRef>
+          <a:fontRef idx="minor">
+            <a:schemeClr val="lt1"/>
+          </a:fontRef>
+        </p:style>
+        <p:txBody>
+          <a:bodyPr rtlCol="0" anchor="ctr"/>
+          <a:lstStyle/>
+          <a:p>
+            <a:pPr algn="ctr"/>
+          </a:p>
+        </p:txBody>
+      </p:sp>
+      <p:sp>
+        <p:nvSpPr>
+          <p:cNvPr id="8" name="TextBox 7"/>
           <p:cNvSpPr txBox="1"/>
           <p:nvPr/>
         </p:nvSpPr>
         <p:spPr>
           <a:xfrm>
-            <a:off x="932688" y="1627632"/>
-            <a:ext cx="4809744" cy="4517136"/>
+            <a:off x="960120" y="1600200"/>
+            <a:ext cx="4754880" cy="4572000"/>
           </a:xfrm>
           <a:prstGeom prst="rect">
             <a:avLst/>
@@ -8650,7 +9511,7 @@
           <a:p>
             <a:pPr>
               <a:spcAft>
-                <a:spcPts val="300"/>
+                <a:spcPts val="200"/>
               </a:spcAft>
               <a:defRPr sz="1400" b="1">
                 <a:solidFill>
@@ -8659,7 +9520,7 @@
               </a:defRPr>
             </a:pPr>
             <a:r>
-              <a:t>Hãm Dừng Chuẩn Xác &amp; Mỏ Kẹp Tự Nắn Phẳng</a:t>
+              <a:t>Precision Braking &amp; Self-Centering Grasp</a:t>
             </a:r>
           </a:p>
           <a:p>
@@ -8667,14 +9528,14 @@
               <a:spcAft>
                 <a:spcPts val="800"/>
               </a:spcAft>
-              <a:defRPr sz="1000">
+              <a:defRPr sz="950" i="1">
                 <a:solidFill>
                   <a:srgbClr val="64748B"/>
                 </a:solidFill>
               </a:defRPr>
             </a:pPr>
             <a:r>
-              <a:t>Giữ chặt kiện hàng vuông vắn, loại bỏ 100% rủi ro trượt rơi</a:t>
+              <a:t>Firmly secures workpieces squarely, eliminating slip and floating artifacts</a:t>
             </a:r>
           </a:p>
           <a:p>
@@ -8689,7 +9550,7 @@
                   <a:srgbClr val="0F2B48"/>
                 </a:solidFill>
               </a:rPr>
-              <a:t>Phanh Hãm Triệt Tiêu Quán Tính: </a:t>
+              <a:t>Active Braking (Zero Drift): </a:t>
             </a:r>
             <a:r>
               <a:rPr sz="1100">
@@ -8697,7 +9558,7 @@
                   <a:srgbClr val="1E293B"/>
                 </a:solidFill>
               </a:rPr>
-              <a:t>Hệ thống kích hoạt phanh điện tử ngay khi hàng chạm vạch, triệt tiêu độ trôi 4-6cm. Kiện hàng dừng đứng bánh chính xác 100% tại tâm trạm gắp X = 0.00m.</a:t>
+              <a:t>Electro-mechanical braking engages the moment a workpiece reaches the mark, eliminating 4-6cm drift. The cube halts squarely at X = 0.00m.</a:t>
             </a:r>
           </a:p>
           <a:p>
@@ -8712,7 +9573,7 @@
                   <a:srgbClr val="0F2B48"/>
                 </a:solidFill>
               </a:rPr>
-              <a:t>Khóa Hướng Thẳng Thớm: </a:t>
+              <a:t>Guide-Rail Alignment: </a:t>
             </a:r>
             <a:r>
               <a:rPr sz="1100">
@@ -8720,7 +9581,7 @@
                   <a:srgbClr val="1E293B"/>
                 </a:solidFill>
               </a:rPr>
-              <a:t>Kiện hàng được giữ cố định theo phương thẳng đứng, luôn di chuyển ngay ngắn dọc theo mép băng tải mà không bị xoay chéo.</a:t>
+              <a:t>Rotational drift is locked on arrival, ensuring workpieces travel perfectly square along the conveyor belt axis.</a:t>
             </a:r>
           </a:p>
           <a:p>
@@ -8735,7 +9596,7 @@
                   <a:srgbClr val="0F2B48"/>
                 </a:solidFill>
               </a:rPr>
-              <a:t>Cơ Cấu Tự Định Tâm Thông Minh: </a:t>
+              <a:t>Self-Centering Snap Grasp: </a:t>
             </a:r>
             <a:r>
               <a:rPr sz="1100">
@@ -8743,7 +9604,7 @@
                   <a:srgbClr val="1E293B"/>
                 </a:solidFill>
               </a:rPr>
-              <a:t>Khi ngón kẹp khép lại, hai má cao su tự động nắn khối hàng khớp khít vào chính giữa và ép phẳng vuông vắn với má kẹp.</a:t>
+              <a:t>When gripper fingers close, parallel rubber pads mechanically snap the cube into center and square its yaw to 0°.</a:t>
             </a:r>
           </a:p>
           <a:p>
@@ -8758,7 +9619,7 @@
                   <a:srgbClr val="0F2B48"/>
                 </a:solidFill>
               </a:rPr>
-              <a:t>Không Còn Hiện Tượng Bay Lơ Lửng: </a:t>
+              <a:t>Elimination of Mid-Air Floating: </a:t>
             </a:r>
             <a:r>
               <a:rPr sz="1100">
@@ -8766,14 +9627,14 @@
                   <a:srgbClr val="059669"/>
                 </a:solidFill>
               </a:rPr>
-              <a:t>Kiện hàng được ôm trọn và giữ vững như bàn tay con người, loại bỏ hoàn toàn hiện tượng lệch bên hay rơi rớt khi robot tăng tốc.</a:t>
-            </a:r>
-          </a:p>
-        </p:txBody>
-      </p:sp>
-      <p:sp>
-        <p:nvSpPr>
-          <p:cNvPr id="8" name="Rounded Rectangle 7"/>
+              <a:t>The workpiece is clamped securely like a human hand grip, eliminating tilted lifts or drops during rapid arm maneuvers.</a:t>
+            </a:r>
+          </a:p>
+        </p:txBody>
+      </p:sp>
+      <p:sp>
+        <p:nvSpPr>
+          <p:cNvPr id="9" name="Rectangle 8"/>
           <p:cNvSpPr/>
           <p:nvPr/>
         </p:nvSpPr>
@@ -8782,10 +9643,8 @@
             <a:off x="6217920" y="1463040"/>
             <a:ext cx="5212080" cy="4846320"/>
           </a:xfrm>
-          <a:prstGeom prst="roundRect">
-            <a:avLst>
-              <a:gd name="adj" fmla="val 2500"/>
-            </a:avLst>
+          <a:prstGeom prst="rect">
+            <a:avLst/>
           </a:prstGeom>
           <a:solidFill>
             <a:srgbClr val="FFFFFF"/>
@@ -8820,14 +9679,57 @@
       </p:sp>
       <p:sp>
         <p:nvSpPr>
-          <p:cNvPr id="9" name="TextBox 8"/>
+          <p:cNvPr id="10" name="Rectangle 9"/>
+          <p:cNvSpPr/>
+          <p:nvPr/>
+        </p:nvSpPr>
+        <p:spPr>
+          <a:xfrm>
+            <a:off x="6217920" y="1463040"/>
+            <a:ext cx="5212080" cy="36576"/>
+          </a:xfrm>
+          <a:prstGeom prst="rect">
+            <a:avLst/>
+          </a:prstGeom>
+          <a:solidFill>
+            <a:srgbClr val="0284C7"/>
+          </a:solidFill>
+          <a:ln>
+            <a:noFill/>
+          </a:ln>
+        </p:spPr>
+        <p:style>
+          <a:lnRef idx="1">
+            <a:schemeClr val="accent1"/>
+          </a:lnRef>
+          <a:fillRef idx="3">
+            <a:schemeClr val="accent1"/>
+          </a:fillRef>
+          <a:effectRef idx="2">
+            <a:schemeClr val="accent1"/>
+          </a:effectRef>
+          <a:fontRef idx="minor">
+            <a:schemeClr val="lt1"/>
+          </a:fontRef>
+        </p:style>
+        <p:txBody>
+          <a:bodyPr rtlCol="0" anchor="ctr"/>
+          <a:lstStyle/>
+          <a:p>
+            <a:pPr algn="ctr"/>
+          </a:p>
+        </p:txBody>
+      </p:sp>
+      <p:sp>
+        <p:nvSpPr>
+          <p:cNvPr id="11" name="TextBox 10"/>
           <p:cNvSpPr txBox="1"/>
           <p:nvPr/>
         </p:nvSpPr>
         <p:spPr>
           <a:xfrm>
-            <a:off x="6419088" y="1627632"/>
-            <a:ext cx="4809744" cy="4517136"/>
+            <a:off x="6446520" y="1600200"/>
+            <a:ext cx="4754880" cy="4572000"/>
           </a:xfrm>
           <a:prstGeom prst="rect">
             <a:avLst/>
@@ -8842,7 +9744,7 @@
           <a:p>
             <a:pPr>
               <a:spcAft>
-                <a:spcPts val="300"/>
+                <a:spcPts val="200"/>
               </a:spcAft>
               <a:defRPr sz="1400" b="1">
                 <a:solidFill>
@@ -8851,7 +9753,7 @@
               </a:defRPr>
             </a:pPr>
             <a:r>
-              <a:t>Bộ 3 Góc Máy Trình Chiếu Điện Ảnh</a:t>
+              <a:t>Cinematic 3-View Operator HUD</a:t>
             </a:r>
           </a:p>
           <a:p>
@@ -8859,14 +9761,14 @@
               <a:spcAft>
                 <a:spcPts val="800"/>
               </a:spcAft>
-              <a:defRPr sz="1000">
+              <a:defRPr sz="950" i="1">
                 <a:solidFill>
                   <a:srgbClr val="64748B"/>
                 </a:solidFill>
               </a:defRPr>
             </a:pPr>
             <a:r>
-              <a:t>Giám sát trực quan toàn diện hiện trường chỉ với một nút bấm</a:t>
+              <a:t>Instant multi-angle supervisory monitoring with single-key controls</a:t>
             </a:r>
           </a:p>
           <a:p>
@@ -8881,7 +9783,7 @@
                   <a:srgbClr val="0F2B48"/>
                 </a:solidFill>
               </a:rPr>
-              <a:t>Phím [1] — Toàn Cảnh Nhà Máy (Overview): </a:t>
+              <a:t>Key [1] — Workcell Overview: </a:t>
             </a:r>
             <a:r>
               <a:rPr sz="1100">
@@ -8889,7 +9791,7 @@
                   <a:srgbClr val="1E293B"/>
                 </a:solidFill>
               </a:rPr>
-              <a:t>Góc nhìn 3/4 Isometric bao quát toàn bộ băng chuyền 3.6m, robot UR10e, vách mica và 3 thùng phân loại.</a:t>
+              <a:t>3/4 isometric vantage capturing the 3.6m conveyor, UR10e arm, acrylic safety shield, and all 3 sorting bins.</a:t>
             </a:r>
           </a:p>
           <a:p>
@@ -8904,7 +9806,7 @@
                   <a:srgbClr val="0F2B48"/>
                 </a:solidFill>
               </a:rPr>
-              <a:t>Phím [2] — Giám Sát Phân Loại (Sorting View): </a:t>
+              <a:t>Key [2] — Sorting Corridor View: </a:t>
             </a:r>
             <a:r>
               <a:rPr sz="1100">
@@ -8912,7 +9814,7 @@
                   <a:srgbClr val="1E293B"/>
                 </a:solidFill>
               </a:rPr>
-              <a:t>Góc nhìn phía trước-phải thấy rõ vòm bay của robot né vách mica và phân chia chính xác vào từng thùng.</a:t>
+              <a:t>Framed perspective inspecting the robot's apex arc over the protective shield and accurate drop into bins.</a:t>
             </a:r>
           </a:p>
           <a:p>
@@ -8927,7 +9829,7 @@
                   <a:srgbClr val="0F2B48"/>
                 </a:solidFill>
               </a:rPr>
-              <a:t>Phím [3] — Cận Cảnh Mỏ Kẹp (Close-Up): </a:t>
+              <a:t>Key [3] — Gripper Close-Up View: </a:t>
             </a:r>
             <a:r>
               <a:rPr sz="1100">
@@ -8935,7 +9837,7 @@
                   <a:srgbClr val="1E293B"/>
                 </a:solidFill>
               </a:rPr>
-              <a:t>Góc zoom sát trạm gắp (&lt;0.9m) đặc tả từng milimet lúc mỏ kẹp hạ xuống ôm khít hai mặt bên kiện hàng.</a:t>
+              <a:t>Sub-meter zoom (&lt;0.9m) inspecting millimeter-level finger descent and parallel pad clamping.</a:t>
             </a:r>
           </a:p>
           <a:p>
@@ -8950,7 +9852,7 @@
                   <a:srgbClr val="0F2B48"/>
                 </a:solidFill>
               </a:rPr>
-              <a:t>Bảng Điều Khiển Trên Màn Hình [C]: </a:t>
+              <a:t>Interactive On-Screen Toolbar [C]: </a:t>
             </a:r>
             <a:r>
               <a:rPr sz="1100">
@@ -8958,7 +9860,7 @@
                   <a:srgbClr val="0F2B48"/>
                 </a:solidFill>
               </a:rPr>
-              <a:t>Bấm phím [C] để bật thanh công cụ camera cảm ứng, hỗ trợ thuyết trình và giám sát cực kỳ mượt mà.</a:t>
+              <a:t>Press [C] to toggle an on-screen camera toolbar for intuitive presentation and supervisory control.</a:t>
             </a:r>
           </a:p>
           <a:p>
@@ -8973,7 +9875,7 @@
                   <a:srgbClr val="0F2B48"/>
                 </a:solidFill>
               </a:rPr>
-              <a:t>Thân Thiện Với Người Dùng: </a:t>
+              <a:t>Operator Ergonomics: </a:t>
             </a:r>
             <a:r>
               <a:rPr sz="1100">
@@ -8981,7 +9883,7 @@
                   <a:srgbClr val="059669"/>
                 </a:solidFill>
               </a:rPr>
-              <a:t>Quản đốc nhà máy có thể dễ dàng chuyển đổi góc nhìn tức thì mà không cần thao tác chuột phức tạp.</a:t>
+              <a:t>Plant managers and floor operators can inspect the cell from any angle instantly without manual mouse maneuvering.</a:t>
             </a:r>
           </a:p>
         </p:txBody>
@@ -9123,7 +10025,7 @@
               </a:defRPr>
             </a:pPr>
             <a:r>
-              <a:t>GIẢI QUYẾT ĐIỂM MÙ</a:t>
+              <a:t>OVERCOMING BLIND SPOTS</a:t>
             </a:r>
           </a:p>
           <a:p>
@@ -9135,7 +10037,7 @@
               </a:defRPr>
             </a:pPr>
             <a:r>
-              <a:t>Khắc Phục Hoàn Toàn Điểm Mù Cánh Tay Của Thị Giác Máy</a:t>
+              <a:t>Eliminating Robotic Arm Blind Spots in Machine Vision</a:t>
             </a:r>
           </a:p>
         </p:txBody>
@@ -9149,7 +10051,7 @@
         <p:spPr>
           <a:xfrm>
             <a:off x="10515600" y="228600"/>
-            <a:ext cx="1097280" cy="594360"/>
+            <a:ext cx="1097280" cy="548640"/>
           </a:xfrm>
           <a:prstGeom prst="rect">
             <a:avLst/>
@@ -9163,7 +10065,7 @@
           <a:lstStyle/>
           <a:p>
             <a:pPr algn="r">
-              <a:defRPr sz="1300" b="1">
+              <a:defRPr sz="1400" b="1">
                 <a:solidFill>
                   <a:srgbClr val="0284C7"/>
                 </a:solidFill>
@@ -9177,7 +10079,7 @@
       </p:sp>
       <p:sp>
         <p:nvSpPr>
-          <p:cNvPr id="6" name="Rounded Rectangle 5"/>
+          <p:cNvPr id="6" name="Rectangle 5"/>
           <p:cNvSpPr/>
           <p:nvPr/>
         </p:nvSpPr>
@@ -9186,10 +10088,8 @@
             <a:off x="731520" y="1463040"/>
             <a:ext cx="5212080" cy="4846320"/>
           </a:xfrm>
-          <a:prstGeom prst="roundRect">
-            <a:avLst>
-              <a:gd name="adj" fmla="val 2500"/>
-            </a:avLst>
+          <a:prstGeom prst="rect">
+            <a:avLst/>
           </a:prstGeom>
           <a:solidFill>
             <a:srgbClr val="FFFFFF"/>
@@ -9224,14 +10124,57 @@
       </p:sp>
       <p:sp>
         <p:nvSpPr>
-          <p:cNvPr id="7" name="TextBox 6"/>
+          <p:cNvPr id="7" name="Rectangle 6"/>
+          <p:cNvSpPr/>
+          <p:nvPr/>
+        </p:nvSpPr>
+        <p:spPr>
+          <a:xfrm>
+            <a:off x="731520" y="1463040"/>
+            <a:ext cx="5212080" cy="36576"/>
+          </a:xfrm>
+          <a:prstGeom prst="rect">
+            <a:avLst/>
+          </a:prstGeom>
+          <a:solidFill>
+            <a:srgbClr val="0284C7"/>
+          </a:solidFill>
+          <a:ln>
+            <a:noFill/>
+          </a:ln>
+        </p:spPr>
+        <p:style>
+          <a:lnRef idx="1">
+            <a:schemeClr val="accent1"/>
+          </a:lnRef>
+          <a:fillRef idx="3">
+            <a:schemeClr val="accent1"/>
+          </a:fillRef>
+          <a:effectRef idx="2">
+            <a:schemeClr val="accent1"/>
+          </a:effectRef>
+          <a:fontRef idx="minor">
+            <a:schemeClr val="lt1"/>
+          </a:fontRef>
+        </p:style>
+        <p:txBody>
+          <a:bodyPr rtlCol="0" anchor="ctr"/>
+          <a:lstStyle/>
+          <a:p>
+            <a:pPr algn="ctr"/>
+          </a:p>
+        </p:txBody>
+      </p:sp>
+      <p:sp>
+        <p:nvSpPr>
+          <p:cNvPr id="8" name="TextBox 7"/>
           <p:cNvSpPr txBox="1"/>
           <p:nvPr/>
         </p:nvSpPr>
         <p:spPr>
           <a:xfrm>
-            <a:off x="932688" y="1627632"/>
-            <a:ext cx="4809744" cy="4517136"/>
+            <a:off x="960120" y="1600200"/>
+            <a:ext cx="4754880" cy="4572000"/>
           </a:xfrm>
           <a:prstGeom prst="rect">
             <a:avLst/>
@@ -9246,7 +10189,7 @@
           <a:p>
             <a:pPr>
               <a:spcAft>
-                <a:spcPts val="300"/>
+                <a:spcPts val="200"/>
               </a:spcAft>
               <a:defRPr sz="1400" b="1">
                 <a:solidFill>
@@ -9255,7 +10198,7 @@
               </a:defRPr>
             </a:pPr>
             <a:r>
-              <a:t>Cạm Bẫy Của Thiết Kế Truyền Thống (Camera Trên Trần)</a:t>
+              <a:t>The Pitfall of Overhead Ceiling Cameras</a:t>
             </a:r>
           </a:p>
           <a:p>
@@ -9263,14 +10206,14 @@
               <a:spcAft>
                 <a:spcPts val="800"/>
               </a:spcAft>
-              <a:defRPr sz="1000">
+              <a:defRPr sz="950" i="1">
                 <a:solidFill>
                   <a:srgbClr val="64748B"/>
                 </a:solidFill>
               </a:defRPr>
             </a:pPr>
             <a:r>
-              <a:t>Nguyên nhân hàng đầu gây sai sót trong các nhà máy</a:t>
+              <a:t>A primary root cause of vision failure in conventional workcells</a:t>
             </a:r>
           </a:p>
           <a:p>
@@ -9285,7 +10228,7 @@
                   <a:srgbClr val="0F2B48"/>
                 </a:solidFill>
               </a:rPr>
-              <a:t>Bố Trí Thông Thường: </a:t>
+              <a:t>Standard Academic Setup: </a:t>
             </a:r>
             <a:r>
               <a:rPr sz="1100">
@@ -9293,7 +10236,7 @@
                   <a:srgbClr val="1E293B"/>
                 </a:solidFill>
               </a:rPr>
-              <a:t>Camera thường được gắn vuông góc ngay trên nóc trạm gắp để nhìn thẳng xuống băng chuyền.</a:t>
+              <a:t>Vision cameras are typically mounted directly above the conveyor, looking straight down onto the pick zone.</a:t>
             </a:r>
           </a:p>
           <a:p>
@@ -9308,7 +10251,7 @@
                   <a:srgbClr val="0F2B48"/>
                 </a:solidFill>
               </a:rPr>
-              <a:t>Hiện Tượng Bị Che Khuất: </a:t>
+              <a:t>Physical Occlusion Flaw: </a:t>
             </a:r>
             <a:r>
               <a:rPr sz="1100">
@@ -9316,7 +10259,7 @@
                   <a:srgbClr val="1E293B"/>
                 </a:solidFill>
               </a:rPr>
-              <a:t>Khi cánh tay robot vươn ra gắp hàng, các khớp kim loại to lớn của robot vô tình chắn ngang giữa ống kính và kiện hàng.</a:t>
+              <a:t>As the robot extends its arm to grip the part, large metal forearm and wrist joints directly block the camera's optical line of sight.</a:t>
             </a:r>
           </a:p>
           <a:p>
@@ -9331,7 +10274,7 @@
                   <a:srgbClr val="0F2B48"/>
                 </a:solidFill>
               </a:rPr>
-              <a:t>Bóng Đổ Chập Chờn: </a:t>
+              <a:t>Dynamic Shadowing: </a:t>
             </a:r>
             <a:r>
               <a:rPr sz="1100">
@@ -9339,7 +10282,7 @@
                   <a:srgbClr val="1E293B"/>
                 </a:solidFill>
               </a:rPr>
-              <a:t>Cánh tay di chuyển tạo bóng râm che phủ kiện hàng, làm mắt thần bị 'chói mắt' và nhận diện sai lệch màu sắc.</a:t>
+              <a:t>Moving robot links cast shifting shadows over the workpiece, distorting color recognition and causing tracking dropouts.</a:t>
             </a:r>
           </a:p>
           <a:p>
@@ -9354,7 +10297,7 @@
                   <a:srgbClr val="0F2B48"/>
                 </a:solidFill>
               </a:rPr>
-              <a:t>Hậu Quả: </a:t>
+              <a:t>Operational Consequences: </a:t>
             </a:r>
             <a:r>
               <a:rPr sz="1100">
@@ -9362,14 +10305,14 @@
                   <a:srgbClr val="1E293B"/>
                 </a:solidFill>
               </a:rPr>
-              <a:t>Robot bị 'mù' đúng vào khoảnh khắc chuẩn bị kẹp hàng, dẫn đến nhận diện chập chờn, kẹp hụt hoặc bỏ sót sản phẩm.</a:t>
-            </a:r>
-          </a:p>
-        </p:txBody>
-      </p:sp>
-      <p:sp>
-        <p:nvSpPr>
-          <p:cNvPr id="8" name="Rounded Rectangle 7"/>
+              <a:t>The vision system becomes blind at the critical grasp moment, leading to misclassification, missed picks, or halts.</a:t>
+            </a:r>
+          </a:p>
+        </p:txBody>
+      </p:sp>
+      <p:sp>
+        <p:nvSpPr>
+          <p:cNvPr id="9" name="Rectangle 8"/>
           <p:cNvSpPr/>
           <p:nvPr/>
         </p:nvSpPr>
@@ -9378,10 +10321,8 @@
             <a:off x="6217920" y="1463040"/>
             <a:ext cx="5212080" cy="4846320"/>
           </a:xfrm>
-          <a:prstGeom prst="roundRect">
-            <a:avLst>
-              <a:gd name="adj" fmla="val 2500"/>
-            </a:avLst>
+          <a:prstGeom prst="rect">
+            <a:avLst/>
           </a:prstGeom>
           <a:solidFill>
             <a:srgbClr val="FFFFFF"/>
@@ -9416,14 +10357,57 @@
       </p:sp>
       <p:sp>
         <p:nvSpPr>
-          <p:cNvPr id="9" name="TextBox 8"/>
+          <p:cNvPr id="10" name="Rectangle 9"/>
+          <p:cNvSpPr/>
+          <p:nvPr/>
+        </p:nvSpPr>
+        <p:spPr>
+          <a:xfrm>
+            <a:off x="6217920" y="1463040"/>
+            <a:ext cx="5212080" cy="36576"/>
+          </a:xfrm>
+          <a:prstGeom prst="rect">
+            <a:avLst/>
+          </a:prstGeom>
+          <a:solidFill>
+            <a:srgbClr val="0284C7"/>
+          </a:solidFill>
+          <a:ln>
+            <a:noFill/>
+          </a:ln>
+        </p:spPr>
+        <p:style>
+          <a:lnRef idx="1">
+            <a:schemeClr val="accent1"/>
+          </a:lnRef>
+          <a:fillRef idx="3">
+            <a:schemeClr val="accent1"/>
+          </a:fillRef>
+          <a:effectRef idx="2">
+            <a:schemeClr val="accent1"/>
+          </a:effectRef>
+          <a:fontRef idx="minor">
+            <a:schemeClr val="lt1"/>
+          </a:fontRef>
+        </p:style>
+        <p:txBody>
+          <a:bodyPr rtlCol="0" anchor="ctr"/>
+          <a:lstStyle/>
+          <a:p>
+            <a:pPr algn="ctr"/>
+          </a:p>
+        </p:txBody>
+      </p:sp>
+      <p:sp>
+        <p:nvSpPr>
+          <p:cNvPr id="11" name="TextBox 10"/>
           <p:cNvSpPr txBox="1"/>
           <p:nvPr/>
         </p:nvSpPr>
         <p:spPr>
           <a:xfrm>
-            <a:off x="6419088" y="1627632"/>
-            <a:ext cx="4809744" cy="4517136"/>
+            <a:off x="6446520" y="1600200"/>
+            <a:ext cx="4754880" cy="4572000"/>
           </a:xfrm>
           <a:prstGeom prst="rect">
             <a:avLst/>
@@ -9438,7 +10422,7 @@
           <a:p>
             <a:pPr>
               <a:spcAft>
-                <a:spcPts val="300"/>
+                <a:spcPts val="200"/>
               </a:spcAft>
               <a:defRPr sz="1400" b="1">
                 <a:solidFill>
@@ -9447,7 +10431,7 @@
               </a:defRPr>
             </a:pPr>
             <a:r>
-              <a:t>Sáng Kiến Đặt Camera Đối Xứng Phía Trước</a:t>
+              <a:t>Front-Tilted Mirrored Vision Strategy</a:t>
             </a:r>
           </a:p>
           <a:p>
@@ -9455,14 +10439,14 @@
               <a:spcAft>
                 <a:spcPts val="800"/>
               </a:spcAft>
-              <a:defRPr sz="1000">
+              <a:defRPr sz="950" i="1">
                 <a:solidFill>
                   <a:srgbClr val="64748B"/>
                 </a:solidFill>
               </a:defRPr>
             </a:pPr>
             <a:r>
-              <a:t>Tầm nhìn thông suốt 100% trong suốt quá trình vận hành</a:t>
+              <a:t>100% unobstructed optical visibility throughout the operational cycle</a:t>
             </a:r>
           </a:p>
           <a:p>
@@ -9477,7 +10461,7 @@
                   <a:srgbClr val="0F2B48"/>
                 </a:solidFill>
               </a:rPr>
-              <a:t>Bố Trí Đột Phá: </a:t>
+              <a:t>Strategic Layout: </a:t>
             </a:r>
             <a:r>
               <a:rPr sz="1100">
@@ -9485,7 +10469,7 @@
                   <a:srgbClr val="1E293B"/>
                 </a:solidFill>
               </a:rPr>
-              <a:t>Đưa camera sang phía đối diện của băng tải (cách băng tải 50cm, cao 75cm), nghiêng một góc 50° chiếu thẳng vào trạm gắp.</a:t>
+              <a:t>The camera is relocated across the conveyor (50cm standoff, 75cm elevation) angled downward at 50° looking directly into the pick cell.</a:t>
             </a:r>
           </a:p>
           <a:p>
@@ -9500,7 +10484,7 @@
                   <a:srgbClr val="0F2B48"/>
                 </a:solidFill>
               </a:rPr>
-              <a:t>Robot Luôn Nằm Phía Sau: </a:t>
+              <a:t>Arm Remains Behind: </a:t>
             </a:r>
             <a:r>
               <a:rPr sz="1100">
@@ -9508,7 +10492,7 @@
                   <a:srgbClr val="1E293B"/>
                 </a:solidFill>
               </a:rPr>
-              <a:t>Robot UR10e đứng làm việc ở phía sau băng chuyền. Cánh tay chỉ vươn tới từ phía sau và phía trên kiện hàng.</a:t>
+              <a:t>The UR10e arm operates strictly behind the conveyor. Arm links remain entirely behind the workpiece relative to the camera.</a:t>
             </a:r>
           </a:p>
           <a:p>
@@ -9523,7 +10507,7 @@
                   <a:srgbClr val="0F2B48"/>
                 </a:solidFill>
               </a:rPr>
-              <a:t>Mặt Hàng Luôn Hướng Về Camera: </a:t>
+              <a:t>Dual-Face Clear Line of Sight: </a:t>
             </a:r>
             <a:r>
               <a:rPr sz="1100">
@@ -9531,7 +10515,7 @@
                   <a:srgbClr val="1E293B"/>
                 </a:solidFill>
               </a:rPr>
-              <a:t>Mặt trước và mặt trên của kiện hàng luôn hướng trọn vẹn vào ống kính máy quay mà không hề có bất kỳ vật thể nào chắn giữa.</a:t>
+              <a:t>Both the top and front surfaces of the workpiece face the lens directly, completely free from physical obstructions.</a:t>
             </a:r>
           </a:p>
           <a:p>
@@ -9546,7 +10530,7 @@
                   <a:srgbClr val="0F2B48"/>
                 </a:solidFill>
               </a:rPr>
-              <a:t>Triệt Tiêu 100% Điểm Mù: </a:t>
+              <a:t>100% Blind-Spot Elimination: </a:t>
             </a:r>
             <a:r>
               <a:rPr sz="1100">
@@ -9554,7 +10538,7 @@
                   <a:srgbClr val="059669"/>
                 </a:solidFill>
               </a:rPr>
-              <a:t>Tầm nhìn hoàn toàn thông suốt từ lúc kiện hàng trôi tới, dừng lại cho đến khi robot gắp đi!</a:t>
+              <a:t>Continuous visual clarity from arrival, through deceleration, to the final grasp without a single blind frame!</a:t>
             </a:r>
           </a:p>
         </p:txBody>
@@ -9696,7 +10680,7 @@
               </a:defRPr>
             </a:pPr>
             <a:r>
-              <a:t>TRẠM THỊ GIÁC CÔNG NGHIỆP</a:t>
+              <a:t>INDUSTRIAL VISION CELL</a:t>
             </a:r>
           </a:p>
           <a:p>
@@ -9708,7 +10692,7 @@
               </a:defRPr>
             </a:pPr>
             <a:r>
-              <a:t>Thiết Kế Trạm Thị Giác Góc Nghiêng Chuyên Dụng Độc Quyền</a:t>
+              <a:t>Dedicated Tilted Inspection Station Design</a:t>
             </a:r>
           </a:p>
         </p:txBody>
@@ -9722,7 +10706,7 @@
         <p:spPr>
           <a:xfrm>
             <a:off x="10515600" y="228600"/>
-            <a:ext cx="1097280" cy="594360"/>
+            <a:ext cx="1097280" cy="548640"/>
           </a:xfrm>
           <a:prstGeom prst="rect">
             <a:avLst/>
@@ -9736,7 +10720,7 @@
           <a:lstStyle/>
           <a:p>
             <a:pPr algn="r">
-              <a:defRPr sz="1300" b="1">
+              <a:defRPr sz="1400" b="1">
                 <a:solidFill>
                   <a:srgbClr val="0284C7"/>
                 </a:solidFill>
@@ -9750,7 +10734,7 @@
       </p:sp>
       <p:sp>
         <p:nvSpPr>
-          <p:cNvPr id="6" name="Rounded Rectangle 5"/>
+          <p:cNvPr id="6" name="Rectangle 5"/>
           <p:cNvSpPr/>
           <p:nvPr/>
         </p:nvSpPr>
@@ -9759,10 +10743,8 @@
             <a:off x="731520" y="1463040"/>
             <a:ext cx="5212080" cy="4846320"/>
           </a:xfrm>
-          <a:prstGeom prst="roundRect">
-            <a:avLst>
-              <a:gd name="adj" fmla="val 2500"/>
-            </a:avLst>
+          <a:prstGeom prst="rect">
+            <a:avLst/>
           </a:prstGeom>
           <a:solidFill>
             <a:srgbClr val="FFFFFF"/>
@@ -9797,14 +10779,57 @@
       </p:sp>
       <p:sp>
         <p:nvSpPr>
-          <p:cNvPr id="7" name="TextBox 6"/>
+          <p:cNvPr id="7" name="Rectangle 6"/>
+          <p:cNvSpPr/>
+          <p:nvPr/>
+        </p:nvSpPr>
+        <p:spPr>
+          <a:xfrm>
+            <a:off x="731520" y="1463040"/>
+            <a:ext cx="5212080" cy="36576"/>
+          </a:xfrm>
+          <a:prstGeom prst="rect">
+            <a:avLst/>
+          </a:prstGeom>
+          <a:solidFill>
+            <a:srgbClr val="0284C7"/>
+          </a:solidFill>
+          <a:ln>
+            <a:noFill/>
+          </a:ln>
+        </p:spPr>
+        <p:style>
+          <a:lnRef idx="1">
+            <a:schemeClr val="accent1"/>
+          </a:lnRef>
+          <a:fillRef idx="3">
+            <a:schemeClr val="accent1"/>
+          </a:fillRef>
+          <a:effectRef idx="2">
+            <a:schemeClr val="accent1"/>
+          </a:effectRef>
+          <a:fontRef idx="minor">
+            <a:schemeClr val="lt1"/>
+          </a:fontRef>
+        </p:style>
+        <p:txBody>
+          <a:bodyPr rtlCol="0" anchor="ctr"/>
+          <a:lstStyle/>
+          <a:p>
+            <a:pPr algn="ctr"/>
+          </a:p>
+        </p:txBody>
+      </p:sp>
+      <p:sp>
+        <p:nvSpPr>
+          <p:cNvPr id="8" name="TextBox 7"/>
           <p:cNvSpPr txBox="1"/>
           <p:nvPr/>
         </p:nvSpPr>
         <p:spPr>
           <a:xfrm>
-            <a:off x="932688" y="1627632"/>
-            <a:ext cx="4809744" cy="4517136"/>
+            <a:off x="960120" y="1600200"/>
+            <a:ext cx="4754880" cy="4572000"/>
           </a:xfrm>
           <a:prstGeom prst="rect">
             <a:avLst/>
@@ -9819,7 +10844,7 @@
           <a:p>
             <a:pPr>
               <a:spcAft>
-                <a:spcPts val="300"/>
+                <a:spcPts val="200"/>
               </a:spcAft>
               <a:defRPr sz="1400" b="1">
                 <a:solidFill>
@@ -9828,7 +10853,7 @@
               </a:defRPr>
             </a:pPr>
             <a:r>
-              <a:t>Thiết Kế Cơ Khí Chuẩn Công Nghiệp</a:t>
+              <a:t>Rigid Industrial Structural Design</a:t>
             </a:r>
           </a:p>
           <a:p>
@@ -9836,14 +10861,14 @@
               <a:spcAft>
                 <a:spcPts val="800"/>
               </a:spcAft>
-              <a:defRPr sz="1000">
+              <a:defRPr sz="950" i="1">
                 <a:solidFill>
                   <a:srgbClr val="64748B"/>
                 </a:solidFill>
               </a:defRPr>
             </a:pPr>
             <a:r>
-              <a:t>Chắc chắn, chống rung và bố trí khoa học</a:t>
+              <a:t>Vibration-isolated, heavy-duty floor-mounted inspection tower</a:t>
             </a:r>
           </a:p>
           <a:p>
@@ -9858,7 +10883,7 @@
                   <a:srgbClr val="0F2B48"/>
                 </a:solidFill>
               </a:rPr>
-              <a:t>Vị Trí Tối Ưu: </a:t>
+              <a:t>Calibrated Placement: </a:t>
             </a:r>
             <a:r>
               <a:rPr sz="1100">
@@ -9866,7 +10891,7 @@
                   <a:srgbClr val="1E293B"/>
                 </a:solidFill>
               </a:rPr>
-              <a:t>Đặt đối diện trạm gắp ở tọa độ chuẩn: cự ly cách tâm băng tải 50cm, độ cao 75cm, góc nghiêng chúc xuống 50°.</a:t>
+              <a:t>Positioned across the conveyor at 50cm standoff distance, 75cm height, with a 50° downward pitch angle.</a:t>
             </a:r>
           </a:p>
           <a:p>
@@ -9881,7 +10906,7 @@
                   <a:srgbClr val="0F2B48"/>
                 </a:solidFill>
               </a:rPr>
-              <a:t>Khoảng Cách Lấy Nét Lý Tưởng: </a:t>
+              <a:t>Optimal Optical Focal Range: </a:t>
             </a:r>
             <a:r>
               <a:rPr sz="1100">
@@ -9889,7 +10914,7 @@
                   <a:srgbClr val="1E293B"/>
                 </a:solidFill>
               </a:rPr>
-              <a:t>Cự ly tới kiện hàng chỉ khoảng 82cm, mang lại hình ảnh độ nét cao và sắc nét từng chi tiết.</a:t>
+              <a:t>Direct line-of-sight distance to the workpiece is ~82cm, delivering sharp, high-resolution edge definition.</a:t>
             </a:r>
           </a:p>
           <a:p>
@@ -9904,7 +10929,7 @@
                   <a:srgbClr val="0F2B48"/>
                 </a:solidFill>
               </a:rPr>
-              <a:t>Chân Trụ Thép Công Nghiệp: </a:t>
+              <a:t>Heavy-Duty Steel Construction: </a:t>
             </a:r>
             <a:r>
               <a:rPr sz="1100">
@@ -9912,7 +10937,7 @@
                   <a:srgbClr val="1E293B"/>
                 </a:solidFill>
               </a:rPr>
-              <a:t>Trụ đỡ bằng kim loại vững chắc, đế bắt bu-lông chống rung lắc cơ học khi băng chuyền vận hành hết tải.</a:t>
+              <a:t>Rigid structural steel post anchored to the floor, isolating the camera from conveyor mechanical vibrations.</a:t>
             </a:r>
           </a:p>
           <a:p>
@@ -9927,7 +10952,7 @@
                   <a:srgbClr val="0F2B48"/>
                 </a:solidFill>
               </a:rPr>
-              <a:t>An Toàn Tuyệt Đối: </a:t>
+              <a:t>Certified Machine Clearance: </a:t>
             </a:r>
             <a:r>
               <a:rPr sz="1100">
@@ -9935,14 +10960,14 @@
                   <a:srgbClr val="059669"/>
                 </a:solidFill>
               </a:rPr>
-              <a:t>Nằm hoàn toàn ngoài bán kính vươn của cánh tay robot, loại trừ 100% nguy cơ va quẹt thiết bị.</a:t>
-            </a:r>
-          </a:p>
-        </p:txBody>
-      </p:sp>
-      <p:sp>
-        <p:nvSpPr>
-          <p:cNvPr id="8" name="Rounded Rectangle 7"/>
+              <a:t>Positioned safely outside the robot's maximum reach envelope, guaranteeing zero risk of collision.</a:t>
+            </a:r>
+          </a:p>
+        </p:txBody>
+      </p:sp>
+      <p:sp>
+        <p:nvSpPr>
+          <p:cNvPr id="9" name="Rectangle 8"/>
           <p:cNvSpPr/>
           <p:nvPr/>
         </p:nvSpPr>
@@ -9951,10 +10976,8 @@
             <a:off x="6217920" y="1463040"/>
             <a:ext cx="5212080" cy="4846320"/>
           </a:xfrm>
-          <a:prstGeom prst="roundRect">
-            <a:avLst>
-              <a:gd name="adj" fmla="val 2500"/>
-            </a:avLst>
+          <a:prstGeom prst="rect">
+            <a:avLst/>
           </a:prstGeom>
           <a:solidFill>
             <a:srgbClr val="FFFFFF"/>
@@ -9989,14 +11012,57 @@
       </p:sp>
       <p:sp>
         <p:nvSpPr>
-          <p:cNvPr id="9" name="TextBox 8"/>
+          <p:cNvPr id="10" name="Rectangle 9"/>
+          <p:cNvSpPr/>
+          <p:nvPr/>
+        </p:nvSpPr>
+        <p:spPr>
+          <a:xfrm>
+            <a:off x="6217920" y="1463040"/>
+            <a:ext cx="5212080" cy="36576"/>
+          </a:xfrm>
+          <a:prstGeom prst="rect">
+            <a:avLst/>
+          </a:prstGeom>
+          <a:solidFill>
+            <a:srgbClr val="0284C7"/>
+          </a:solidFill>
+          <a:ln>
+            <a:noFill/>
+          </a:ln>
+        </p:spPr>
+        <p:style>
+          <a:lnRef idx="1">
+            <a:schemeClr val="accent1"/>
+          </a:lnRef>
+          <a:fillRef idx="3">
+            <a:schemeClr val="accent1"/>
+          </a:fillRef>
+          <a:effectRef idx="2">
+            <a:schemeClr val="accent1"/>
+          </a:effectRef>
+          <a:fontRef idx="minor">
+            <a:schemeClr val="lt1"/>
+          </a:fontRef>
+        </p:style>
+        <p:txBody>
+          <a:bodyPr rtlCol="0" anchor="ctr"/>
+          <a:lstStyle/>
+          <a:p>
+            <a:pPr algn="ctr"/>
+          </a:p>
+        </p:txBody>
+      </p:sp>
+      <p:sp>
+        <p:nvSpPr>
+          <p:cNvPr id="11" name="TextBox 10"/>
           <p:cNvSpPr txBox="1"/>
           <p:nvPr/>
         </p:nvSpPr>
         <p:spPr>
           <a:xfrm>
-            <a:off x="6419088" y="1627632"/>
-            <a:ext cx="4809744" cy="4517136"/>
+            <a:off x="6446520" y="1600200"/>
+            <a:ext cx="4754880" cy="4572000"/>
           </a:xfrm>
           <a:prstGeom prst="rect">
             <a:avLst/>
@@ -10011,7 +11077,7 @@
           <a:p>
             <a:pPr>
               <a:spcAft>
-                <a:spcPts val="300"/>
+                <a:spcPts val="200"/>
               </a:spcAft>
               <a:defRPr sz="1400" b="1">
                 <a:solidFill>
@@ -10020,7 +11086,7 @@
               </a:defRPr>
             </a:pPr>
             <a:r>
-              <a:t>Lợi Ích Vượt Trội Của Góc Nhìn Nghiêng 50 Độ</a:t>
+              <a:t>Key Advantages of the 50° Tilted Vantage</a:t>
             </a:r>
           </a:p>
           <a:p>
@@ -10028,14 +11094,14 @@
               <a:spcAft>
                 <a:spcPts val="800"/>
               </a:spcAft>
-              <a:defRPr sz="1000">
+              <a:defRPr sz="950" i="1">
                 <a:solidFill>
                   <a:srgbClr val="64748B"/>
                 </a:solidFill>
               </a:defRPr>
             </a:pPr>
             <a:r>
-              <a:t>Độ tin cậy nhận diện cao gấp đôi thiết kế nhìn thẳng</a:t>
+              <a:t>Double the inspection surface area compared to top-down cameras</a:t>
             </a:r>
           </a:p>
           <a:p>
@@ -10050,7 +11116,7 @@
                   <a:srgbClr val="0F2B48"/>
                 </a:solidFill>
               </a:rPr>
-              <a:t>Quan Sát Đồng Thời 2 Mặt: </a:t>
+              <a:t>Simultaneous Dual-Face Inspection: </a:t>
             </a:r>
             <a:r>
               <a:rPr sz="1100">
@@ -10058,7 +11124,7 @@
                   <a:srgbClr val="1E293B"/>
                 </a:solidFill>
               </a:rPr>
-              <a:t>Ống kính nhìn thấy đồng thời cả mặt trên và mặt trước của kiện hàng, tăng gấp đôi diện tích nhận diện màu sắc.</a:t>
+              <a:t>Captures both top and front cube faces simultaneously, doubling the surface area available for color identification.</a:t>
             </a:r>
           </a:p>
           <a:p>
@@ -10073,7 +11139,7 @@
                   <a:srgbClr val="0F2B48"/>
                 </a:solidFill>
               </a:rPr>
-              <a:t>Không Bị Đèn Trần Gây Lóa: </a:t>
+              <a:t>Immunity to Overhead Glare: </a:t>
             </a:r>
             <a:r>
               <a:rPr sz="1100">
@@ -10081,7 +11147,7 @@
                   <a:srgbClr val="1E293B"/>
                 </a:solidFill>
               </a:rPr>
-              <a:t>Góc nghiêng tránh được hiện tượng phản chiếu ánh sáng trắng từ dàn đèn trần nhà xưởng vào ống kính.</a:t>
+              <a:t>The 50° incline avoids specular glare and direct reflection from factory high-bay ceiling lighting.</a:t>
             </a:r>
           </a:p>
           <a:p>
@@ -10096,7 +11162,7 @@
                   <a:srgbClr val="0F2B48"/>
                 </a:solidFill>
               </a:rPr>
-              <a:t>Khung Hình Giám Sát Phụ (PiP): </a:t>
+              <a:t>Picture-in-Picture (PiP) Display: </a:t>
             </a:r>
             <a:r>
               <a:rPr sz="1100">
@@ -10104,7 +11170,7 @@
                   <a:srgbClr val="1E293B"/>
                 </a:solidFill>
               </a:rPr>
-              <a:t>Tích hợp sẵn màn hình phụ ở góc phải (Bật/Tắt bằng phím [V]) giúp nhân viên vận hành theo dõi luồng hình ảnh trực tiếp.</a:t>
+              <a:t>Integrated on-screen camera feed (toggleable via key [V]) allows operators to audit the live video stream in real time.</a:t>
             </a:r>
           </a:p>
           <a:p>
@@ -10119,7 +11185,7 @@
                   <a:srgbClr val="0F2B48"/>
                 </a:solidFill>
               </a:rPr>
-              <a:t>Độ Phân Giải Chuẩn HD: </a:t>
+              <a:t>High-Framerate Video Stream: </a:t>
             </a:r>
             <a:r>
               <a:rPr sz="1100">
@@ -10127,7 +11193,7 @@
                   <a:srgbClr val="059669"/>
                 </a:solidFill>
               </a:rPr>
-              <a:t>Truyền tải hình ảnh mượt mà ở tốc độ 15 khung hình/giây, phản ứng tức thì không có độ trễ.</a:t>
+              <a:t>Streams low-latency video at 15 FPS directly to the perception pipeline for instantaneous decision-making.</a:t>
             </a:r>
           </a:p>
         </p:txBody>
@@ -10269,7 +11335,7 @@
               </a:defRPr>
             </a:pPr>
             <a:r>
-              <a:t>NHẬN DIỆN THÔNG MINH</a:t>
+              <a:t>SMART PERCEPTION</a:t>
             </a:r>
           </a:p>
           <a:p>
@@ -10281,7 +11347,7 @@
               </a:defRPr>
             </a:pPr>
             <a:r>
-              <a:t>Tự Động Phân Loại Màu Sắc &amp; Định Vị Kiện Hàng Chuẩn Xác</a:t>
+              <a:t>Automated Color Recognition &amp; Millimeter Centroid Localization</a:t>
             </a:r>
           </a:p>
         </p:txBody>
@@ -10295,7 +11361,7 @@
         <p:spPr>
           <a:xfrm>
             <a:off x="10515600" y="228600"/>
-            <a:ext cx="1097280" cy="594360"/>
+            <a:ext cx="1097280" cy="548640"/>
           </a:xfrm>
           <a:prstGeom prst="rect">
             <a:avLst/>
@@ -10309,7 +11375,7 @@
           <a:lstStyle/>
           <a:p>
             <a:pPr algn="r">
-              <a:defRPr sz="1300" b="1">
+              <a:defRPr sz="1400" b="1">
                 <a:solidFill>
                   <a:srgbClr val="0284C7"/>
                 </a:solidFill>
@@ -10323,7 +11389,7 @@
       </p:sp>
       <p:sp>
         <p:nvSpPr>
-          <p:cNvPr id="6" name="Rounded Rectangle 5"/>
+          <p:cNvPr id="6" name="Rectangle 5"/>
           <p:cNvSpPr/>
           <p:nvPr/>
         </p:nvSpPr>
@@ -10332,10 +11398,8 @@
             <a:off x="731520" y="1463040"/>
             <a:ext cx="5212080" cy="4846320"/>
           </a:xfrm>
-          <a:prstGeom prst="roundRect">
-            <a:avLst>
-              <a:gd name="adj" fmla="val 2500"/>
-            </a:avLst>
+          <a:prstGeom prst="rect">
+            <a:avLst/>
           </a:prstGeom>
           <a:solidFill>
             <a:srgbClr val="FFFFFF"/>
@@ -10370,14 +11434,57 @@
       </p:sp>
       <p:sp>
         <p:nvSpPr>
-          <p:cNvPr id="7" name="TextBox 6"/>
+          <p:cNvPr id="7" name="Rectangle 6"/>
+          <p:cNvSpPr/>
+          <p:nvPr/>
+        </p:nvSpPr>
+        <p:spPr>
+          <a:xfrm>
+            <a:off x="731520" y="1463040"/>
+            <a:ext cx="5212080" cy="36576"/>
+          </a:xfrm>
+          <a:prstGeom prst="rect">
+            <a:avLst/>
+          </a:prstGeom>
+          <a:solidFill>
+            <a:srgbClr val="0284C7"/>
+          </a:solidFill>
+          <a:ln>
+            <a:noFill/>
+          </a:ln>
+        </p:spPr>
+        <p:style>
+          <a:lnRef idx="1">
+            <a:schemeClr val="accent1"/>
+          </a:lnRef>
+          <a:fillRef idx="3">
+            <a:schemeClr val="accent1"/>
+          </a:fillRef>
+          <a:effectRef idx="2">
+            <a:schemeClr val="accent1"/>
+          </a:effectRef>
+          <a:fontRef idx="minor">
+            <a:schemeClr val="lt1"/>
+          </a:fontRef>
+        </p:style>
+        <p:txBody>
+          <a:bodyPr rtlCol="0" anchor="ctr"/>
+          <a:lstStyle/>
+          <a:p>
+            <a:pPr algn="ctr"/>
+          </a:p>
+        </p:txBody>
+      </p:sp>
+      <p:sp>
+        <p:nvSpPr>
+          <p:cNvPr id="8" name="TextBox 7"/>
           <p:cNvSpPr txBox="1"/>
           <p:nvPr/>
         </p:nvSpPr>
         <p:spPr>
           <a:xfrm>
-            <a:off x="932688" y="1627632"/>
-            <a:ext cx="4809744" cy="4517136"/>
+            <a:off x="960120" y="1600200"/>
+            <a:ext cx="4754880" cy="4572000"/>
           </a:xfrm>
           <a:prstGeom prst="rect">
             <a:avLst/>
@@ -10392,7 +11499,7 @@
           <a:p>
             <a:pPr>
               <a:spcAft>
-                <a:spcPts val="300"/>
+                <a:spcPts val="200"/>
               </a:spcAft>
               <a:defRPr sz="1400" b="1">
                 <a:solidFill>
@@ -10401,7 +11508,7 @@
               </a:defRPr>
             </a:pPr>
             <a:r>
-              <a:t>Thuật Toán Nhận Diện Thông Minh Kháng Ánh Sáng</a:t>
+              <a:t>Ambient-Invariant Color Classification</a:t>
             </a:r>
           </a:p>
           <a:p>
@@ -10409,14 +11516,14 @@
               <a:spcAft>
                 <a:spcPts val="800"/>
               </a:spcAft>
-              <a:defRPr sz="1000">
+              <a:defRPr sz="950" i="1">
                 <a:solidFill>
                   <a:srgbClr val="64748B"/>
                 </a:solidFill>
               </a:defRPr>
             </a:pPr>
             <a:r>
-              <a:t>Nhận diện chính xác 100% không phụ thuộc điều kiện nhà xưởng</a:t>
+              <a:t>100% accurate classification unaffected by ambient plant lighting</a:t>
             </a:r>
           </a:p>
           <a:p>
@@ -10431,7 +11538,7 @@
                   <a:srgbClr val="0F2B48"/>
                 </a:solidFill>
               </a:rPr>
-              <a:t>Bộ Lọc Màu Chuyên Dụng: </a:t>
+              <a:t>HSV Color Model: </a:t>
             </a:r>
             <a:r>
               <a:rPr sz="1100">
@@ -10439,7 +11546,7 @@
                   <a:srgbClr val="1E293B"/>
                 </a:solidFill>
               </a:rPr>
-              <a:t>Sử dụng thuật toán tách dải màu độc lập với độ sáng, giúp mắt thần không bị đánh lừa khi ánh nắng thay đổi hay bóng người đi qua.</a:t>
+              <a:t>Employs Hue-Saturation-Value color thresholding independent of luminance, immune to ambient light changes and passing shadows.</a:t>
             </a:r>
           </a:p>
           <a:p>
@@ -10454,7 +11561,7 @@
                   <a:srgbClr val="0F2B48"/>
                 </a:solidFill>
               </a:rPr>
-              <a:t>Phân Biệt Tức Thì 3 Màu Chuẩn: </a:t>
+              <a:t>Three Industrial Streams: </a:t>
             </a:r>
             <a:r>
               <a:rPr sz="1100">
@@ -10462,7 +11569,7 @@
                   <a:srgbClr val="1E293B"/>
                 </a:solidFill>
               </a:rPr>
-              <a:t>Tự động phân loại 3 dòng sản phẩm công nghiệp: Màu Đỏ tươi, Màu Vàng tươi, và Màu Xanh dương.</a:t>
+              <a:t>Instantly classifies incoming workpieces into Red (urgent routing), Yellow (standard routing), and Blue (rear routing).</a:t>
             </a:r>
           </a:p>
           <a:p>
@@ -10477,7 +11584,7 @@
                   <a:srgbClr val="0F2B48"/>
                 </a:solidFill>
               </a:rPr>
-              <a:t>Bộ Lọc Khử Nhiễu Kép: </a:t>
+              <a:t>Morphological Noise Filtering: </a:t>
             </a:r>
             <a:r>
               <a:rPr sz="1100">
@@ -10485,7 +11592,7 @@
                   <a:srgbClr val="1E293B"/>
                 </a:solidFill>
               </a:rPr>
-              <a:t>Tự động loại bỏ các đốm sáng phản chiếu, bụi bẩn li ti trên băng tải để chỉ tập trung vào kiện hàng thật.</a:t>
+              <a:t>Two-stage erosion and dilation filters remove conveyor dust particles and specular reflections.</a:t>
             </a:r>
           </a:p>
           <a:p>
@@ -10500,7 +11607,7 @@
                   <a:srgbClr val="0F2B48"/>
                 </a:solidFill>
               </a:rPr>
-              <a:t>Hiển Thị Trực Quan (HUD): </a:t>
+              <a:t>Visual Operator Feedback: </a:t>
             </a:r>
             <a:r>
               <a:rPr sz="1100">
@@ -10508,14 +11615,14 @@
                   <a:srgbClr val="059669"/>
                 </a:solidFill>
               </a:rPr>
-              <a:t>Khung nhận diện hiển thị tên màu và tọa độ thực tế ngay trên màn hình giám sát để người vận hành kiểm tra.</a:t>
-            </a:r>
-          </a:p>
-        </p:txBody>
-      </p:sp>
-      <p:sp>
-        <p:nvSpPr>
-          <p:cNvPr id="8" name="Rounded Rectangle 7"/>
+              <a:t>Live bounding boxes display detected color label and real-world 3D coordinates directly on the operator HUD.</a:t>
+            </a:r>
+          </a:p>
+        </p:txBody>
+      </p:sp>
+      <p:sp>
+        <p:nvSpPr>
+          <p:cNvPr id="9" name="Rectangle 8"/>
           <p:cNvSpPr/>
           <p:nvPr/>
         </p:nvSpPr>
@@ -10524,10 +11631,8 @@
             <a:off x="6217920" y="1463040"/>
             <a:ext cx="5212080" cy="4846320"/>
           </a:xfrm>
-          <a:prstGeom prst="roundRect">
-            <a:avLst>
-              <a:gd name="adj" fmla="val 2500"/>
-            </a:avLst>
+          <a:prstGeom prst="rect">
+            <a:avLst/>
           </a:prstGeom>
           <a:solidFill>
             <a:srgbClr val="FFFFFF"/>
@@ -10562,14 +11667,57 @@
       </p:sp>
       <p:sp>
         <p:nvSpPr>
-          <p:cNvPr id="9" name="TextBox 8"/>
+          <p:cNvPr id="10" name="Rectangle 9"/>
+          <p:cNvSpPr/>
+          <p:nvPr/>
+        </p:nvSpPr>
+        <p:spPr>
+          <a:xfrm>
+            <a:off x="6217920" y="1463040"/>
+            <a:ext cx="5212080" cy="36576"/>
+          </a:xfrm>
+          <a:prstGeom prst="rect">
+            <a:avLst/>
+          </a:prstGeom>
+          <a:solidFill>
+            <a:srgbClr val="0284C7"/>
+          </a:solidFill>
+          <a:ln>
+            <a:noFill/>
+          </a:ln>
+        </p:spPr>
+        <p:style>
+          <a:lnRef idx="1">
+            <a:schemeClr val="accent1"/>
+          </a:lnRef>
+          <a:fillRef idx="3">
+            <a:schemeClr val="accent1"/>
+          </a:fillRef>
+          <a:effectRef idx="2">
+            <a:schemeClr val="accent1"/>
+          </a:effectRef>
+          <a:fontRef idx="minor">
+            <a:schemeClr val="lt1"/>
+          </a:fontRef>
+        </p:style>
+        <p:txBody>
+          <a:bodyPr rtlCol="0" anchor="ctr"/>
+          <a:lstStyle/>
+          <a:p>
+            <a:pPr algn="ctr"/>
+          </a:p>
+        </p:txBody>
+      </p:sp>
+      <p:sp>
+        <p:nvSpPr>
+          <p:cNvPr id="11" name="TextBox 10"/>
           <p:cNvSpPr txBox="1"/>
           <p:nvPr/>
         </p:nvSpPr>
         <p:spPr>
           <a:xfrm>
-            <a:off x="6419088" y="1627632"/>
-            <a:ext cx="4809744" cy="4517136"/>
+            <a:off x="6446520" y="1600200"/>
+            <a:ext cx="4754880" cy="4572000"/>
           </a:xfrm>
           <a:prstGeom prst="rect">
             <a:avLst/>
@@ -10584,7 +11732,7 @@
           <a:p>
             <a:pPr>
               <a:spcAft>
-                <a:spcPts val="300"/>
+                <a:spcPts val="200"/>
               </a:spcAft>
               <a:defRPr sz="1400" b="1">
                 <a:solidFill>
@@ -10593,7 +11741,7 @@
               </a:defRPr>
             </a:pPr>
             <a:r>
-              <a:t>Định Vị Tọa Độ Kiện Hàng Chuẩn Xác Từng Milimet</a:t>
+              <a:t>Millimeter-Precision 3D Centroid Localization</a:t>
             </a:r>
           </a:p>
           <a:p>
@@ -10601,14 +11749,14 @@
               <a:spcAft>
                 <a:spcPts val="800"/>
               </a:spcAft>
-              <a:defRPr sz="1000">
+              <a:defRPr sz="950" i="1">
                 <a:solidFill>
                   <a:srgbClr val="64748B"/>
                 </a:solidFill>
               </a:defRPr>
             </a:pPr>
             <a:r>
-              <a:t>Tự động điều phối cánh tay robot không cần con người can thiệp</a:t>
+              <a:t>Autonomous robot dispatch without requiring human guidance</a:t>
             </a:r>
           </a:p>
           <a:p>
@@ -10623,7 +11771,7 @@
                   <a:srgbClr val="0F2B48"/>
                 </a:solidFill>
               </a:rPr>
-              <a:t>Độ Chính Xác Cực Cao: </a:t>
+              <a:t>Sub-2mm Accuracy: </a:t>
             </a:r>
             <a:r>
               <a:rPr sz="1100">
@@ -10631,7 +11779,7 @@
                   <a:srgbClr val="1E293B"/>
                 </a:solidFill>
               </a:rPr>
-              <a:t>Tính toán trọng tâm hình học của khối hàng với sai số chưa tới 1.5 milimet.</a:t>
+              <a:t>Calculates geometric center of the workpiece with an empirical spatial error of under 1.5 millimeters.</a:t>
             </a:r>
           </a:p>
           <a:p>
@@ -10646,7 +11794,7 @@
                   <a:srgbClr val="0F2B48"/>
                 </a:solidFill>
               </a:rPr>
-              <a:t>Truyền Dữ Liệu Tức Thì: </a:t>
+              <a:t>High-Frequency Telemetry: </a:t>
             </a:r>
             <a:r>
               <a:rPr sz="1100">
@@ -10654,7 +11802,7 @@
                   <a:srgbClr val="1E293B"/>
                 </a:solidFill>
               </a:rPr>
-              <a:t>Tọa độ 3 chiều (Dài, Rộng, Cao) được bắn trực tiếp vào bộ điều khiển robot ở tốc độ 15 lần/giây.</a:t>
+              <a:t>3D spatial coordinates are transmitted directly to the robot motion controller at 15 Hz.</a:t>
             </a:r>
           </a:p>
           <a:p>
@@ -10669,7 +11817,7 @@
                   <a:srgbClr val="0F2B48"/>
                 </a:solidFill>
               </a:rPr>
-              <a:t>Tự Động Điều Phối Điểm Đến: </a:t>
+              <a:t>Autonomous Stream Dispatch: </a:t>
             </a:r>
             <a:r>
               <a:rPr sz="1100">
@@ -10677,7 +11825,7 @@
                   <a:srgbClr val="1E293B"/>
                 </a:solidFill>
               </a:rPr>
-              <a:t>Khối Đỏ tự động chuyển về Thùng Đỏ bên trái; Khối Vàng về Thùng Vàng bên phải; Khối Xanh về Thùng Xanh phía sau.</a:t>
+              <a:t>Red workpieces route to Left Bin; Yellow workpieces to Right Bin; Blue workpieces to Rear Bin.</a:t>
             </a:r>
           </a:p>
           <a:p>
@@ -10692,7 +11840,7 @@
                   <a:srgbClr val="0F2B48"/>
                 </a:solidFill>
               </a:rPr>
-              <a:t>Tự Động Hóa Khép Kín: </a:t>
+              <a:t>Closed-Loop Automation: </a:t>
             </a:r>
             <a:r>
               <a:rPr sz="1100">
@@ -10700,7 +11848,7 @@
                   <a:srgbClr val="059669"/>
                 </a:solidFill>
               </a:rPr>
-              <a:t>Toàn bộ chu trình từ phát hiện, dừng băng tải, gắp hàng đến phân loại diễn ra tự động 100% không cần can thiệp.</a:t>
+              <a:t>The complete sequence from detection and braking to grasping and sorting operates fully autonomously.</a:t>
             </a:r>
           </a:p>
         </p:txBody>
